--- a/slides/04_Dia_4_Observabilidad_DevSecOps_Proyecto.pptx
+++ b/slides/04_Dia_4_Observabilidad_DevSecOps_Proyecto.pptx
@@ -1925,7 +1925,7 @@
     <p:bg>
       <p:bgPr>
         <a:solidFill>
-          <a:srgbClr val="0B1B2B"/>
+          <a:srgbClr val="0A1622"/>
         </a:solidFill>
       </p:bgPr>
     </p:bg>
@@ -1963,6 +1963,13 @@
             <a:srgbClr val="22D3EE"/>
           </a:solidFill>
           <a:ln/>
+          <a:effectLst>
+            <a:outerShdw sx="100000" sy="100000" kx="0" ky="0" algn="bl" rotWithShape="0" blurRad="50800" dist="25400" dir="5400000">
+              <a:srgbClr val="000000">
+                <a:alpha val="40000"/>
+              </a:srgbClr>
+            </a:outerShdw>
+          </a:effectLst>
         </p:spPr>
       </p:sp>
       <p:sp>
@@ -2110,7 +2117,27 @@
       </p:sp>
       <p:sp>
         <p:nvSpPr>
-          <p:cNvPr id="7" name="Text 5"/>
+          <p:cNvPr id="7" name="Shape 5"/>
+          <p:cNvSpPr/>
+          <p:nvPr/>
+        </p:nvSpPr>
+        <p:spPr>
+          <a:xfrm>
+            <a:off x="566928" y="3154680"/>
+            <a:ext cx="1280160" cy="36576"/>
+          </a:xfrm>
+          <a:prstGeom prst="rect">
+            <a:avLst/>
+          </a:prstGeom>
+          <a:solidFill>
+            <a:srgbClr val="22D3EE"/>
+          </a:solidFill>
+          <a:ln/>
+        </p:spPr>
+      </p:sp>
+      <p:sp>
+        <p:nvSpPr>
+          <p:cNvPr id="8" name="Text 6"/>
           <p:cNvSpPr/>
           <p:nvPr/>
         </p:nvSpPr>
@@ -2135,7 +2162,7 @@
             <a:r>
               <a:rPr lang="en-US" sz="1700" dirty="0">
                 <a:solidFill>
-                  <a:srgbClr val="A8B4C4"/>
+                  <a:srgbClr val="9FB0C2"/>
                 </a:solidFill>
                 <a:latin typeface="Calibri" pitchFamily="34" charset="0"/>
                 <a:ea typeface="Calibri" pitchFamily="34" charset="-122"/>
@@ -2149,7 +2176,7 @@
       </p:sp>
       <p:sp>
         <p:nvSpPr>
-          <p:cNvPr id="8" name="Shape 6"/>
+          <p:cNvPr id="9" name="Shape 7"/>
           <p:cNvSpPr/>
           <p:nvPr/>
         </p:nvSpPr>
@@ -2162,14 +2189,14 @@
             <a:avLst/>
           </a:prstGeom>
           <a:solidFill>
-            <a:srgbClr val="284963"/>
+            <a:srgbClr val="264862"/>
           </a:solidFill>
           <a:ln/>
         </p:spPr>
       </p:sp>
       <p:sp>
         <p:nvSpPr>
-          <p:cNvPr id="9" name="Text 7"/>
+          <p:cNvPr id="10" name="Text 8"/>
           <p:cNvSpPr/>
           <p:nvPr/>
         </p:nvSpPr>
@@ -2194,7 +2221,7 @@
             <a:r>
               <a:rPr lang="en-US" sz="1200" dirty="0">
                 <a:solidFill>
-                  <a:srgbClr val="A8B4C4"/>
+                  <a:srgbClr val="9FB0C2"/>
                 </a:solidFill>
                 <a:latin typeface="Consolas" pitchFamily="34" charset="0"/>
                 <a:ea typeface="Consolas" pitchFamily="34" charset="-122"/>
@@ -2220,7 +2247,7 @@
     <p:bg>
       <p:bgPr>
         <a:solidFill>
-          <a:srgbClr val="0B1B2B"/>
+          <a:srgbClr val="0A1622"/>
         </a:solidFill>
       </p:bgPr>
     </p:bg>
@@ -2258,6 +2285,13 @@
             <a:srgbClr val="22D3EE"/>
           </a:solidFill>
           <a:ln/>
+          <a:effectLst>
+            <a:outerShdw sx="100000" sy="100000" kx="0" ky="0" algn="bl" rotWithShape="0" blurRad="50800" dist="25400" dir="5400000">
+              <a:srgbClr val="000000">
+                <a:alpha val="40000"/>
+              </a:srgbClr>
+            </a:outerShdw>
+          </a:effectLst>
         </p:spPr>
       </p:sp>
       <p:sp>
@@ -2287,7 +2321,7 @@
             <a:r>
               <a:rPr lang="en-US" sz="2200" b="1" dirty="0">
                 <a:solidFill>
-                  <a:srgbClr val="0B1B2B"/>
+                  <a:srgbClr val="0A1622"/>
                 </a:solidFill>
                 <a:latin typeface="Consolas" pitchFamily="34" charset="0"/>
                 <a:ea typeface="Consolas" pitchFamily="34" charset="-122"/>
@@ -2379,7 +2413,27 @@
       </p:sp>
       <p:sp>
         <p:nvSpPr>
-          <p:cNvPr id="6" name="Text 4"/>
+          <p:cNvPr id="6" name="Shape 4"/>
+          <p:cNvSpPr/>
+          <p:nvPr/>
+        </p:nvSpPr>
+        <p:spPr>
+          <a:xfrm>
+            <a:off x="1298448" y="1316736"/>
+            <a:ext cx="1005840" cy="32004"/>
+          </a:xfrm>
+          <a:prstGeom prst="rect">
+            <a:avLst/>
+          </a:prstGeom>
+          <a:solidFill>
+            <a:srgbClr val="22D3EE"/>
+          </a:solidFill>
+          <a:ln/>
+        </p:spPr>
+      </p:sp>
+      <p:sp>
+        <p:nvSpPr>
+          <p:cNvPr id="7" name="Text 5"/>
           <p:cNvSpPr/>
           <p:nvPr/>
         </p:nvSpPr>
@@ -2408,7 +2462,7 @@
             <a:r>
               <a:rPr lang="en-US" sz="1800" b="1" dirty="0">
                 <a:solidFill>
-                  <a:srgbClr val="E8EEF5"/>
+                  <a:srgbClr val="EAF1F8"/>
                 </a:solidFill>
                 <a:latin typeface="Calibri" pitchFamily="34" charset="0"/>
                 <a:ea typeface="Calibri" pitchFamily="34" charset="-122"/>
@@ -2429,7 +2483,7 @@
             <a:r>
               <a:rPr lang="en-US" sz="1800" b="1" dirty="0">
                 <a:solidFill>
-                  <a:srgbClr val="E8EEF5"/>
+                  <a:srgbClr val="EAF1F8"/>
                 </a:solidFill>
                 <a:latin typeface="Calibri" pitchFamily="34" charset="0"/>
                 <a:ea typeface="Calibri" pitchFamily="34" charset="-122"/>
@@ -2450,7 +2504,7 @@
             <a:r>
               <a:rPr lang="en-US" sz="1800" b="1" dirty="0">
                 <a:solidFill>
-                  <a:srgbClr val="E8EEF5"/>
+                  <a:srgbClr val="EAF1F8"/>
                 </a:solidFill>
                 <a:latin typeface="Calibri" pitchFamily="34" charset="0"/>
                 <a:ea typeface="Calibri" pitchFamily="34" charset="-122"/>
@@ -2497,7 +2551,7 @@
     <p:bg>
       <p:bgPr>
         <a:solidFill>
-          <a:srgbClr val="0B1B2B"/>
+          <a:srgbClr val="0A1622"/>
         </a:solidFill>
       </p:bgPr>
     </p:bg>
@@ -2535,6 +2589,13 @@
             <a:srgbClr val="22D3EE"/>
           </a:solidFill>
           <a:ln/>
+          <a:effectLst>
+            <a:outerShdw sx="100000" sy="100000" kx="0" ky="0" algn="bl" rotWithShape="0" blurRad="50800" dist="25400" dir="5400000">
+              <a:srgbClr val="000000">
+                <a:alpha val="40000"/>
+              </a:srgbClr>
+            </a:outerShdw>
+          </a:effectLst>
         </p:spPr>
       </p:sp>
       <p:sp>
@@ -2564,7 +2625,7 @@
             <a:r>
               <a:rPr lang="en-US" sz="2200" b="1" dirty="0">
                 <a:solidFill>
-                  <a:srgbClr val="0B1B2B"/>
+                  <a:srgbClr val="0A1622"/>
                 </a:solidFill>
                 <a:latin typeface="Consolas" pitchFamily="34" charset="0"/>
                 <a:ea typeface="Consolas" pitchFamily="34" charset="-122"/>
@@ -2656,7 +2717,27 @@
       </p:sp>
       <p:sp>
         <p:nvSpPr>
-          <p:cNvPr id="6" name="Text 4"/>
+          <p:cNvPr id="6" name="Shape 4"/>
+          <p:cNvSpPr/>
+          <p:nvPr/>
+        </p:nvSpPr>
+        <p:spPr>
+          <a:xfrm>
+            <a:off x="1298448" y="1316736"/>
+            <a:ext cx="1005840" cy="32004"/>
+          </a:xfrm>
+          <a:prstGeom prst="rect">
+            <a:avLst/>
+          </a:prstGeom>
+          <a:solidFill>
+            <a:srgbClr val="22D3EE"/>
+          </a:solidFill>
+          <a:ln/>
+        </p:spPr>
+      </p:sp>
+      <p:sp>
+        <p:nvSpPr>
+          <p:cNvPr id="7" name="Text 5"/>
           <p:cNvSpPr/>
           <p:nvPr/>
         </p:nvSpPr>
@@ -2685,7 +2766,7 @@
             <a:r>
               <a:rPr lang="en-US" sz="1600" b="1" dirty="0">
                 <a:solidFill>
-                  <a:srgbClr val="E8EEF5"/>
+                  <a:srgbClr val="EAF1F8"/>
                 </a:solidFill>
                 <a:latin typeface="Calibri" pitchFamily="34" charset="0"/>
                 <a:ea typeface="Calibri" pitchFamily="34" charset="-122"/>
@@ -2706,7 +2787,7 @@
             <a:r>
               <a:rPr lang="en-US" sz="1600" dirty="0">
                 <a:solidFill>
-                  <a:srgbClr val="E8EEF5"/>
+                  <a:srgbClr val="EAF1F8"/>
                 </a:solidFill>
                 <a:latin typeface="Calibri" pitchFamily="34" charset="0"/>
                 <a:ea typeface="Calibri" pitchFamily="34" charset="-122"/>
@@ -2753,7 +2834,7 @@
     <p:bg>
       <p:bgPr>
         <a:solidFill>
-          <a:srgbClr val="0B1B2B"/>
+          <a:srgbClr val="0A1622"/>
         </a:solidFill>
       </p:bgPr>
     </p:bg>
@@ -2791,6 +2872,13 @@
             <a:srgbClr val="22D3EE"/>
           </a:solidFill>
           <a:ln/>
+          <a:effectLst>
+            <a:outerShdw sx="100000" sy="100000" kx="0" ky="0" algn="bl" rotWithShape="0" blurRad="50800" dist="25400" dir="5400000">
+              <a:srgbClr val="000000">
+                <a:alpha val="40000"/>
+              </a:srgbClr>
+            </a:outerShdw>
+          </a:effectLst>
         </p:spPr>
       </p:sp>
       <p:sp>
@@ -2820,7 +2908,7 @@
             <a:r>
               <a:rPr lang="en-US" sz="2200" b="1" dirty="0">
                 <a:solidFill>
-                  <a:srgbClr val="0B1B2B"/>
+                  <a:srgbClr val="0A1622"/>
                 </a:solidFill>
                 <a:latin typeface="Consolas" pitchFamily="34" charset="0"/>
                 <a:ea typeface="Consolas" pitchFamily="34" charset="-122"/>
@@ -2909,6 +2997,26 @@
             <a:endParaRPr lang="en-US" sz="2500" dirty="0"/>
           </a:p>
         </p:txBody>
+      </p:sp>
+      <p:sp>
+        <p:nvSpPr>
+          <p:cNvPr id="6" name="Shape 4"/>
+          <p:cNvSpPr/>
+          <p:nvPr/>
+        </p:nvSpPr>
+        <p:spPr>
+          <a:xfrm>
+            <a:off x="1298448" y="1316736"/>
+            <a:ext cx="1005840" cy="32004"/>
+          </a:xfrm>
+          <a:prstGeom prst="rect">
+            <a:avLst/>
+          </a:prstGeom>
+          <a:solidFill>
+            <a:srgbClr val="22D3EE"/>
+          </a:solidFill>
+          <a:ln/>
+        </p:spPr>
       </p:sp>
       <p:graphicFrame>
         <p:nvGraphicFramePr>
@@ -2948,7 +3056,7 @@
                       <a:r>
                         <a:rPr lang="en-US" sz="1250" b="1" dirty="0">
                           <a:solidFill>
-                            <a:srgbClr val="0B1B2B"/>
+                            <a:srgbClr val="0A1622"/>
                           </a:solidFill>
                           <a:latin typeface="Calibri" pitchFamily="34" charset="0"/>
                           <a:ea typeface="Calibri" pitchFamily="34" charset="-122"/>
@@ -2963,10 +3071,10 @@
                       </a:endParaRPr>
                     </a:p>
                   </a:txBody>
-                  <a:tcPr marL="50800" marR="50800" marT="50800" marB="50800" anchor="ctr">
+                  <a:tcPr marL="76200" marR="76200" marT="76200" marB="76200" anchor="ctr">
                     <a:lnL w="12700" cap="flat" cmpd="sng" algn="ctr">
                       <a:solidFill>
-                        <a:srgbClr val="284963"/>
+                        <a:srgbClr val="264862"/>
                       </a:solidFill>
                       <a:prstDash val="solid"/>
                       <a:round/>
@@ -2975,7 +3083,7 @@
                     </a:lnL>
                     <a:lnR w="12700" cap="flat" cmpd="sng" algn="ctr">
                       <a:solidFill>
-                        <a:srgbClr val="284963"/>
+                        <a:srgbClr val="264862"/>
                       </a:solidFill>
                       <a:prstDash val="solid"/>
                       <a:round/>
@@ -2984,7 +3092,7 @@
                     </a:lnR>
                     <a:lnT w="12700" cap="flat" cmpd="sng" algn="ctr">
                       <a:solidFill>
-                        <a:srgbClr val="284963"/>
+                        <a:srgbClr val="264862"/>
                       </a:solidFill>
                       <a:prstDash val="solid"/>
                       <a:round/>
@@ -2993,7 +3101,7 @@
                     </a:lnT>
                     <a:lnB w="12700" cap="flat" cmpd="sng" algn="ctr">
                       <a:solidFill>
-                        <a:srgbClr val="284963"/>
+                        <a:srgbClr val="264862"/>
                       </a:solidFill>
                       <a:prstDash val="solid"/>
                       <a:round/>
@@ -3016,7 +3124,7 @@
                       <a:r>
                         <a:rPr lang="en-US" sz="1250" b="1" dirty="0">
                           <a:solidFill>
-                            <a:srgbClr val="0B1B2B"/>
+                            <a:srgbClr val="0A1622"/>
                           </a:solidFill>
                           <a:latin typeface="Calibri" pitchFamily="34" charset="0"/>
                           <a:ea typeface="Calibri" pitchFamily="34" charset="-122"/>
@@ -3031,10 +3139,10 @@
                       </a:endParaRPr>
                     </a:p>
                   </a:txBody>
-                  <a:tcPr marL="50800" marR="50800" marT="50800" marB="50800" anchor="ctr">
+                  <a:tcPr marL="76200" marR="76200" marT="76200" marB="76200" anchor="ctr">
                     <a:lnL w="12700" cap="flat" cmpd="sng" algn="ctr">
                       <a:solidFill>
-                        <a:srgbClr val="284963"/>
+                        <a:srgbClr val="264862"/>
                       </a:solidFill>
                       <a:prstDash val="solid"/>
                       <a:round/>
@@ -3043,7 +3151,7 @@
                     </a:lnL>
                     <a:lnR w="12700" cap="flat" cmpd="sng" algn="ctr">
                       <a:solidFill>
-                        <a:srgbClr val="284963"/>
+                        <a:srgbClr val="264862"/>
                       </a:solidFill>
                       <a:prstDash val="solid"/>
                       <a:round/>
@@ -3052,7 +3160,7 @@
                     </a:lnR>
                     <a:lnT w="12700" cap="flat" cmpd="sng" algn="ctr">
                       <a:solidFill>
-                        <a:srgbClr val="284963"/>
+                        <a:srgbClr val="264862"/>
                       </a:solidFill>
                       <a:prstDash val="solid"/>
                       <a:round/>
@@ -3061,7 +3169,7 @@
                     </a:lnT>
                     <a:lnB w="12700" cap="flat" cmpd="sng" algn="ctr">
                       <a:solidFill>
-                        <a:srgbClr val="284963"/>
+                        <a:srgbClr val="264862"/>
                       </a:solidFill>
                       <a:prstDash val="solid"/>
                       <a:round/>
@@ -3086,7 +3194,7 @@
                       <a:r>
                         <a:rPr lang="en-US" sz="1150" dirty="0">
                           <a:solidFill>
-                            <a:srgbClr val="E8EEF5"/>
+                            <a:srgbClr val="EAF1F8"/>
                           </a:solidFill>
                           <a:latin typeface="Calibri" pitchFamily="34" charset="0"/>
                           <a:ea typeface="Calibri" pitchFamily="34" charset="-122"/>
@@ -3101,10 +3209,10 @@
                       </a:endParaRPr>
                     </a:p>
                   </a:txBody>
-                  <a:tcPr marL="50800" marR="50800" marT="50800" marB="50800" anchor="ctr">
+                  <a:tcPr marL="76200" marR="76200" marT="76200" marB="76200" anchor="ctr">
                     <a:lnL w="12700" cap="flat" cmpd="sng" algn="ctr">
                       <a:solidFill>
-                        <a:srgbClr val="284963"/>
+                        <a:srgbClr val="264862"/>
                       </a:solidFill>
                       <a:prstDash val="solid"/>
                       <a:round/>
@@ -3113,7 +3221,7 @@
                     </a:lnL>
                     <a:lnR w="12700" cap="flat" cmpd="sng" algn="ctr">
                       <a:solidFill>
-                        <a:srgbClr val="284963"/>
+                        <a:srgbClr val="264862"/>
                       </a:solidFill>
                       <a:prstDash val="solid"/>
                       <a:round/>
@@ -3122,7 +3230,7 @@
                     </a:lnR>
                     <a:lnT w="12700" cap="flat" cmpd="sng" algn="ctr">
                       <a:solidFill>
-                        <a:srgbClr val="284963"/>
+                        <a:srgbClr val="264862"/>
                       </a:solidFill>
                       <a:prstDash val="solid"/>
                       <a:round/>
@@ -3131,7 +3239,7 @@
                     </a:lnT>
                     <a:lnB w="12700" cap="flat" cmpd="sng" algn="ctr">
                       <a:solidFill>
-                        <a:srgbClr val="284963"/>
+                        <a:srgbClr val="264862"/>
                       </a:solidFill>
                       <a:prstDash val="solid"/>
                       <a:round/>
@@ -3139,7 +3247,7 @@
                       <a:tailEnd type="none" w="med" len="med"/>
                     </a:lnB>
                     <a:solidFill>
-                      <a:srgbClr val="16314A"/>
+                      <a:srgbClr val="0F2133"/>
                     </a:solidFill>
                   </a:tcPr>
                 </a:tc>
@@ -3154,7 +3262,7 @@
                       <a:r>
                         <a:rPr lang="en-US" sz="1150" dirty="0">
                           <a:solidFill>
-                            <a:srgbClr val="E8EEF5"/>
+                            <a:srgbClr val="EAF1F8"/>
                           </a:solidFill>
                           <a:latin typeface="Calibri" pitchFamily="34" charset="0"/>
                           <a:ea typeface="Calibri" pitchFamily="34" charset="-122"/>
@@ -3169,10 +3277,10 @@
                       </a:endParaRPr>
                     </a:p>
                   </a:txBody>
-                  <a:tcPr marL="50800" marR="50800" marT="50800" marB="50800" anchor="ctr">
+                  <a:tcPr marL="76200" marR="76200" marT="76200" marB="76200" anchor="ctr">
                     <a:lnL w="12700" cap="flat" cmpd="sng" algn="ctr">
                       <a:solidFill>
-                        <a:srgbClr val="284963"/>
+                        <a:srgbClr val="264862"/>
                       </a:solidFill>
                       <a:prstDash val="solid"/>
                       <a:round/>
@@ -3181,7 +3289,7 @@
                     </a:lnL>
                     <a:lnR w="12700" cap="flat" cmpd="sng" algn="ctr">
                       <a:solidFill>
-                        <a:srgbClr val="284963"/>
+                        <a:srgbClr val="264862"/>
                       </a:solidFill>
                       <a:prstDash val="solid"/>
                       <a:round/>
@@ -3190,7 +3298,7 @@
                     </a:lnR>
                     <a:lnT w="12700" cap="flat" cmpd="sng" algn="ctr">
                       <a:solidFill>
-                        <a:srgbClr val="284963"/>
+                        <a:srgbClr val="264862"/>
                       </a:solidFill>
                       <a:prstDash val="solid"/>
                       <a:round/>
@@ -3199,7 +3307,7 @@
                     </a:lnT>
                     <a:lnB w="12700" cap="flat" cmpd="sng" algn="ctr">
                       <a:solidFill>
-                        <a:srgbClr val="284963"/>
+                        <a:srgbClr val="264862"/>
                       </a:solidFill>
                       <a:prstDash val="solid"/>
                       <a:round/>
@@ -3207,7 +3315,7 @@
                       <a:tailEnd type="none" w="med" len="med"/>
                     </a:lnB>
                     <a:solidFill>
-                      <a:srgbClr val="16314A"/>
+                      <a:srgbClr val="0F2133"/>
                     </a:solidFill>
                   </a:tcPr>
                 </a:tc>
@@ -3224,7 +3332,7 @@
                       <a:r>
                         <a:rPr lang="en-US" sz="1150" dirty="0">
                           <a:solidFill>
-                            <a:srgbClr val="E8EEF5"/>
+                            <a:srgbClr val="EAF1F8"/>
                           </a:solidFill>
                           <a:latin typeface="Calibri" pitchFamily="34" charset="0"/>
                           <a:ea typeface="Calibri" pitchFamily="34" charset="-122"/>
@@ -3239,10 +3347,10 @@
                       </a:endParaRPr>
                     </a:p>
                   </a:txBody>
-                  <a:tcPr marL="50800" marR="50800" marT="50800" marB="50800" anchor="ctr">
+                  <a:tcPr marL="76200" marR="76200" marT="76200" marB="76200" anchor="ctr">
                     <a:lnL w="12700" cap="flat" cmpd="sng" algn="ctr">
                       <a:solidFill>
-                        <a:srgbClr val="284963"/>
+                        <a:srgbClr val="264862"/>
                       </a:solidFill>
                       <a:prstDash val="solid"/>
                       <a:round/>
@@ -3251,7 +3359,7 @@
                     </a:lnL>
                     <a:lnR w="12700" cap="flat" cmpd="sng" algn="ctr">
                       <a:solidFill>
-                        <a:srgbClr val="284963"/>
+                        <a:srgbClr val="264862"/>
                       </a:solidFill>
                       <a:prstDash val="solid"/>
                       <a:round/>
@@ -3260,7 +3368,7 @@
                     </a:lnR>
                     <a:lnT w="12700" cap="flat" cmpd="sng" algn="ctr">
                       <a:solidFill>
-                        <a:srgbClr val="284963"/>
+                        <a:srgbClr val="264862"/>
                       </a:solidFill>
                       <a:prstDash val="solid"/>
                       <a:round/>
@@ -3269,7 +3377,7 @@
                     </a:lnT>
                     <a:lnB w="12700" cap="flat" cmpd="sng" algn="ctr">
                       <a:solidFill>
-                        <a:srgbClr val="284963"/>
+                        <a:srgbClr val="264862"/>
                       </a:solidFill>
                       <a:prstDash val="solid"/>
                       <a:round/>
@@ -3277,7 +3385,7 @@
                       <a:tailEnd type="none" w="med" len="med"/>
                     </a:lnB>
                     <a:solidFill>
-                      <a:srgbClr val="12293D"/>
+                      <a:srgbClr val="13283C"/>
                     </a:solidFill>
                   </a:tcPr>
                 </a:tc>
@@ -3292,7 +3400,7 @@
                       <a:r>
                         <a:rPr lang="en-US" sz="1150" dirty="0">
                           <a:solidFill>
-                            <a:srgbClr val="E8EEF5"/>
+                            <a:srgbClr val="EAF1F8"/>
                           </a:solidFill>
                           <a:latin typeface="Calibri" pitchFamily="34" charset="0"/>
                           <a:ea typeface="Calibri" pitchFamily="34" charset="-122"/>
@@ -3307,10 +3415,10 @@
                       </a:endParaRPr>
                     </a:p>
                   </a:txBody>
-                  <a:tcPr marL="50800" marR="50800" marT="50800" marB="50800" anchor="ctr">
+                  <a:tcPr marL="76200" marR="76200" marT="76200" marB="76200" anchor="ctr">
                     <a:lnL w="12700" cap="flat" cmpd="sng" algn="ctr">
                       <a:solidFill>
-                        <a:srgbClr val="284963"/>
+                        <a:srgbClr val="264862"/>
                       </a:solidFill>
                       <a:prstDash val="solid"/>
                       <a:round/>
@@ -3319,7 +3427,7 @@
                     </a:lnL>
                     <a:lnR w="12700" cap="flat" cmpd="sng" algn="ctr">
                       <a:solidFill>
-                        <a:srgbClr val="284963"/>
+                        <a:srgbClr val="264862"/>
                       </a:solidFill>
                       <a:prstDash val="solid"/>
                       <a:round/>
@@ -3328,7 +3436,7 @@
                     </a:lnR>
                     <a:lnT w="12700" cap="flat" cmpd="sng" algn="ctr">
                       <a:solidFill>
-                        <a:srgbClr val="284963"/>
+                        <a:srgbClr val="264862"/>
                       </a:solidFill>
                       <a:prstDash val="solid"/>
                       <a:round/>
@@ -3337,7 +3445,7 @@
                     </a:lnT>
                     <a:lnB w="12700" cap="flat" cmpd="sng" algn="ctr">
                       <a:solidFill>
-                        <a:srgbClr val="284963"/>
+                        <a:srgbClr val="264862"/>
                       </a:solidFill>
                       <a:prstDash val="solid"/>
                       <a:round/>
@@ -3345,7 +3453,7 @@
                       <a:tailEnd type="none" w="med" len="med"/>
                     </a:lnB>
                     <a:solidFill>
-                      <a:srgbClr val="12293D"/>
+                      <a:srgbClr val="13283C"/>
                     </a:solidFill>
                   </a:tcPr>
                 </a:tc>
@@ -3362,7 +3470,7 @@
                       <a:r>
                         <a:rPr lang="en-US" sz="1150" dirty="0">
                           <a:solidFill>
-                            <a:srgbClr val="E8EEF5"/>
+                            <a:srgbClr val="EAF1F8"/>
                           </a:solidFill>
                           <a:latin typeface="Calibri" pitchFamily="34" charset="0"/>
                           <a:ea typeface="Calibri" pitchFamily="34" charset="-122"/>
@@ -3377,10 +3485,10 @@
                       </a:endParaRPr>
                     </a:p>
                   </a:txBody>
-                  <a:tcPr marL="50800" marR="50800" marT="50800" marB="50800" anchor="ctr">
+                  <a:tcPr marL="76200" marR="76200" marT="76200" marB="76200" anchor="ctr">
                     <a:lnL w="12700" cap="flat" cmpd="sng" algn="ctr">
                       <a:solidFill>
-                        <a:srgbClr val="284963"/>
+                        <a:srgbClr val="264862"/>
                       </a:solidFill>
                       <a:prstDash val="solid"/>
                       <a:round/>
@@ -3389,7 +3497,7 @@
                     </a:lnL>
                     <a:lnR w="12700" cap="flat" cmpd="sng" algn="ctr">
                       <a:solidFill>
-                        <a:srgbClr val="284963"/>
+                        <a:srgbClr val="264862"/>
                       </a:solidFill>
                       <a:prstDash val="solid"/>
                       <a:round/>
@@ -3398,7 +3506,7 @@
                     </a:lnR>
                     <a:lnT w="12700" cap="flat" cmpd="sng" algn="ctr">
                       <a:solidFill>
-                        <a:srgbClr val="284963"/>
+                        <a:srgbClr val="264862"/>
                       </a:solidFill>
                       <a:prstDash val="solid"/>
                       <a:round/>
@@ -3407,7 +3515,7 @@
                     </a:lnT>
                     <a:lnB w="12700" cap="flat" cmpd="sng" algn="ctr">
                       <a:solidFill>
-                        <a:srgbClr val="284963"/>
+                        <a:srgbClr val="264862"/>
                       </a:solidFill>
                       <a:prstDash val="solid"/>
                       <a:round/>
@@ -3415,7 +3523,7 @@
                       <a:tailEnd type="none" w="med" len="med"/>
                     </a:lnB>
                     <a:solidFill>
-                      <a:srgbClr val="16314A"/>
+                      <a:srgbClr val="0F2133"/>
                     </a:solidFill>
                   </a:tcPr>
                 </a:tc>
@@ -3430,7 +3538,7 @@
                       <a:r>
                         <a:rPr lang="en-US" sz="1150" dirty="0">
                           <a:solidFill>
-                            <a:srgbClr val="E8EEF5"/>
+                            <a:srgbClr val="EAF1F8"/>
                           </a:solidFill>
                           <a:latin typeface="Calibri" pitchFamily="34" charset="0"/>
                           <a:ea typeface="Calibri" pitchFamily="34" charset="-122"/>
@@ -3445,10 +3553,10 @@
                       </a:endParaRPr>
                     </a:p>
                   </a:txBody>
-                  <a:tcPr marL="50800" marR="50800" marT="50800" marB="50800" anchor="ctr">
+                  <a:tcPr marL="76200" marR="76200" marT="76200" marB="76200" anchor="ctr">
                     <a:lnL w="12700" cap="flat" cmpd="sng" algn="ctr">
                       <a:solidFill>
-                        <a:srgbClr val="284963"/>
+                        <a:srgbClr val="264862"/>
                       </a:solidFill>
                       <a:prstDash val="solid"/>
                       <a:round/>
@@ -3457,7 +3565,7 @@
                     </a:lnL>
                     <a:lnR w="12700" cap="flat" cmpd="sng" algn="ctr">
                       <a:solidFill>
-                        <a:srgbClr val="284963"/>
+                        <a:srgbClr val="264862"/>
                       </a:solidFill>
                       <a:prstDash val="solid"/>
                       <a:round/>
@@ -3466,7 +3574,7 @@
                     </a:lnR>
                     <a:lnT w="12700" cap="flat" cmpd="sng" algn="ctr">
                       <a:solidFill>
-                        <a:srgbClr val="284963"/>
+                        <a:srgbClr val="264862"/>
                       </a:solidFill>
                       <a:prstDash val="solid"/>
                       <a:round/>
@@ -3475,7 +3583,7 @@
                     </a:lnT>
                     <a:lnB w="12700" cap="flat" cmpd="sng" algn="ctr">
                       <a:solidFill>
-                        <a:srgbClr val="284963"/>
+                        <a:srgbClr val="264862"/>
                       </a:solidFill>
                       <a:prstDash val="solid"/>
                       <a:round/>
@@ -3483,7 +3591,7 @@
                       <a:tailEnd type="none" w="med" len="med"/>
                     </a:lnB>
                     <a:solidFill>
-                      <a:srgbClr val="16314A"/>
+                      <a:srgbClr val="0F2133"/>
                     </a:solidFill>
                   </a:tcPr>
                 </a:tc>
@@ -3506,7 +3614,7 @@
     <p:bg>
       <p:bgPr>
         <a:solidFill>
-          <a:srgbClr val="0B1B2B"/>
+          <a:srgbClr val="0A1622"/>
         </a:solidFill>
       </p:bgPr>
     </p:bg>
@@ -3629,7 +3737,7 @@
             <a:r>
               <a:rPr lang="en-US" sz="1600" dirty="0">
                 <a:solidFill>
-                  <a:srgbClr val="A8B4C4"/>
+                  <a:srgbClr val="9FB0C2"/>
                 </a:solidFill>
                 <a:latin typeface="Calibri" pitchFamily="34" charset="0"/>
                 <a:ea typeface="Calibri" pitchFamily="34" charset="-122"/>
@@ -3694,7 +3802,7 @@
     <p:bg>
       <p:bgPr>
         <a:solidFill>
-          <a:srgbClr val="0B1B2B"/>
+          <a:srgbClr val="0A1622"/>
         </a:solidFill>
       </p:bgPr>
     </p:bg>
@@ -3732,6 +3840,13 @@
             <a:srgbClr val="22D3EE"/>
           </a:solidFill>
           <a:ln/>
+          <a:effectLst>
+            <a:outerShdw sx="100000" sy="100000" kx="0" ky="0" algn="bl" rotWithShape="0" blurRad="50800" dist="25400" dir="5400000">
+              <a:srgbClr val="000000">
+                <a:alpha val="40000"/>
+              </a:srgbClr>
+            </a:outerShdw>
+          </a:effectLst>
         </p:spPr>
       </p:sp>
       <p:sp>
@@ -3761,7 +3876,7 @@
             <a:r>
               <a:rPr lang="en-US" sz="2200" b="1" dirty="0">
                 <a:solidFill>
-                  <a:srgbClr val="0B1B2B"/>
+                  <a:srgbClr val="0A1622"/>
                 </a:solidFill>
                 <a:latin typeface="Consolas" pitchFamily="34" charset="0"/>
                 <a:ea typeface="Consolas" pitchFamily="34" charset="-122"/>
@@ -3859,14 +3974,36 @@
         </p:nvSpPr>
         <p:spPr>
           <a:xfrm>
+            <a:off x="1298448" y="1316736"/>
+            <a:ext cx="1005840" cy="32004"/>
+          </a:xfrm>
+          <a:prstGeom prst="rect">
+            <a:avLst/>
+          </a:prstGeom>
+          <a:solidFill>
+            <a:srgbClr val="22D3EE"/>
+          </a:solidFill>
+          <a:ln/>
+        </p:spPr>
+      </p:sp>
+      <p:sp>
+        <p:nvSpPr>
+          <p:cNvPr id="7" name="Shape 5"/>
+          <p:cNvSpPr/>
+          <p:nvPr/>
+        </p:nvSpPr>
+        <p:spPr>
+          <a:xfrm>
             <a:off x="548640" y="1691640"/>
             <a:ext cx="2542032" cy="2743200"/>
           </a:xfrm>
-          <a:prstGeom prst="rect">
-            <a:avLst/>
+          <a:prstGeom prst="roundRect">
+            <a:avLst>
+              <a:gd name="adj" fmla="val 1799"/>
+            </a:avLst>
           </a:prstGeom>
           <a:solidFill>
-            <a:srgbClr val="12293D"/>
+            <a:srgbClr val="13283C"/>
           </a:solidFill>
           <a:ln w="15875">
             <a:solidFill>
@@ -3874,18 +4011,25 @@
             </a:solidFill>
             <a:prstDash val="solid"/>
           </a:ln>
-        </p:spPr>
-      </p:sp>
-      <p:sp>
-        <p:nvSpPr>
-          <p:cNvPr id="7" name="Shape 5"/>
-          <p:cNvSpPr/>
-          <p:nvPr/>
-        </p:nvSpPr>
-        <p:spPr>
-          <a:xfrm>
-            <a:off x="548640" y="1691640"/>
-            <a:ext cx="82296" cy="2743200"/>
+          <a:effectLst>
+            <a:outerShdw sx="100000" sy="100000" kx="0" ky="0" algn="bl" rotWithShape="0" blurRad="88900" dist="38100" dir="5400000">
+              <a:srgbClr val="000000">
+                <a:alpha val="50000"/>
+              </a:srgbClr>
+            </a:outerShdw>
+          </a:effectLst>
+        </p:spPr>
+      </p:sp>
+      <p:sp>
+        <p:nvSpPr>
+          <p:cNvPr id="8" name="Shape 6"/>
+          <p:cNvSpPr/>
+          <p:nvPr/>
+        </p:nvSpPr>
+        <p:spPr>
+          <a:xfrm>
+            <a:off x="562356" y="1764792"/>
+            <a:ext cx="73152" cy="2596896"/>
           </a:xfrm>
           <a:prstGeom prst="rect">
             <a:avLst/>
@@ -3898,14 +4042,14 @@
       </p:sp>
       <p:sp>
         <p:nvSpPr>
-          <p:cNvPr id="8" name="Text 6"/>
-          <p:cNvSpPr/>
-          <p:nvPr/>
-        </p:nvSpPr>
-        <p:spPr>
-          <a:xfrm>
-            <a:off x="786384" y="1837944"/>
-            <a:ext cx="2157984" cy="384048"/>
+          <p:cNvPr id="9" name="Text 7"/>
+          <p:cNvSpPr/>
+          <p:nvPr/>
+        </p:nvSpPr>
+        <p:spPr>
+          <a:xfrm>
+            <a:off x="804672" y="1828800"/>
+            <a:ext cx="2139696" cy="384048"/>
           </a:xfrm>
           <a:prstGeom prst="rect">
             <a:avLst/>
@@ -3921,7 +4065,7 @@
               <a:buNone/>
             </a:pPr>
             <a:r>
-              <a:rPr lang="en-US" sz="1500" b="1" dirty="0">
+              <a:rPr lang="en-US" sz="1500" b="1" spc="50" kern="0" dirty="0">
                 <a:solidFill>
                   <a:srgbClr val="22D3EE"/>
                 </a:solidFill>
@@ -3937,14 +4081,34 @@
       </p:sp>
       <p:sp>
         <p:nvSpPr>
-          <p:cNvPr id="9" name="Text 7"/>
-          <p:cNvSpPr/>
-          <p:nvPr/>
-        </p:nvSpPr>
-        <p:spPr>
-          <a:xfrm>
-            <a:off x="786384" y="2276856"/>
-            <a:ext cx="2084832" cy="2011680"/>
+          <p:cNvPr id="10" name="Shape 8"/>
+          <p:cNvSpPr/>
+          <p:nvPr/>
+        </p:nvSpPr>
+        <p:spPr>
+          <a:xfrm>
+            <a:off x="804672" y="2221992"/>
+            <a:ext cx="2029968" cy="16459"/>
+          </a:xfrm>
+          <a:prstGeom prst="rect">
+            <a:avLst/>
+          </a:prstGeom>
+          <a:solidFill>
+            <a:srgbClr val="264862"/>
+          </a:solidFill>
+          <a:ln/>
+        </p:spPr>
+      </p:sp>
+      <p:sp>
+        <p:nvSpPr>
+          <p:cNvPr id="11" name="Text 9"/>
+          <p:cNvSpPr/>
+          <p:nvPr/>
+        </p:nvSpPr>
+        <p:spPr>
+          <a:xfrm>
+            <a:off x="804672" y="2331720"/>
+            <a:ext cx="2066544" cy="1956816"/>
           </a:xfrm>
           <a:prstGeom prst="rect">
             <a:avLst/>
@@ -3966,7 +4130,7 @@
             <a:r>
               <a:rPr lang="en-US" sz="1250" dirty="0">
                 <a:solidFill>
-                  <a:srgbClr val="E8EEF5"/>
+                  <a:srgbClr val="EAF1F8"/>
                 </a:solidFill>
                 <a:latin typeface="Calibri" pitchFamily="34" charset="0"/>
                 <a:ea typeface="Calibri" pitchFamily="34" charset="-122"/>
@@ -3987,7 +4151,7 @@
             <a:r>
               <a:rPr lang="en-US" sz="1250" dirty="0">
                 <a:solidFill>
-                  <a:srgbClr val="E8EEF5"/>
+                  <a:srgbClr val="EAF1F8"/>
                 </a:solidFill>
                 <a:latin typeface="Calibri" pitchFamily="34" charset="0"/>
                 <a:ea typeface="Calibri" pitchFamily="34" charset="-122"/>
@@ -4008,7 +4172,7 @@
             <a:r>
               <a:rPr lang="en-US" sz="1250" dirty="0">
                 <a:solidFill>
-                  <a:srgbClr val="E8EEF5"/>
+                  <a:srgbClr val="EAF1F8"/>
                 </a:solidFill>
                 <a:latin typeface="Calibri" pitchFamily="34" charset="0"/>
                 <a:ea typeface="Calibri" pitchFamily="34" charset="-122"/>
@@ -4022,7 +4186,7 @@
       </p:sp>
       <p:sp>
         <p:nvSpPr>
-          <p:cNvPr id="10" name="Shape 8"/>
+          <p:cNvPr id="12" name="Shape 10"/>
           <p:cNvSpPr/>
           <p:nvPr/>
         </p:nvSpPr>
@@ -4031,11 +4195,13 @@
             <a:off x="3200400" y="1691640"/>
             <a:ext cx="2542032" cy="2743200"/>
           </a:xfrm>
-          <a:prstGeom prst="rect">
-            <a:avLst/>
+          <a:prstGeom prst="roundRect">
+            <a:avLst>
+              <a:gd name="adj" fmla="val 1799"/>
+            </a:avLst>
           </a:prstGeom>
           <a:solidFill>
-            <a:srgbClr val="12293D"/>
+            <a:srgbClr val="13283C"/>
           </a:solidFill>
           <a:ln w="15875">
             <a:solidFill>
@@ -4043,18 +4209,25 @@
             </a:solidFill>
             <a:prstDash val="solid"/>
           </a:ln>
-        </p:spPr>
-      </p:sp>
-      <p:sp>
-        <p:nvSpPr>
-          <p:cNvPr id="11" name="Shape 9"/>
-          <p:cNvSpPr/>
-          <p:nvPr/>
-        </p:nvSpPr>
-        <p:spPr>
-          <a:xfrm>
-            <a:off x="3200400" y="1691640"/>
-            <a:ext cx="82296" cy="2743200"/>
+          <a:effectLst>
+            <a:outerShdw sx="100000" sy="100000" kx="0" ky="0" algn="bl" rotWithShape="0" blurRad="88900" dist="38100" dir="5400000">
+              <a:srgbClr val="000000">
+                <a:alpha val="50000"/>
+              </a:srgbClr>
+            </a:outerShdw>
+          </a:effectLst>
+        </p:spPr>
+      </p:sp>
+      <p:sp>
+        <p:nvSpPr>
+          <p:cNvPr id="13" name="Shape 11"/>
+          <p:cNvSpPr/>
+          <p:nvPr/>
+        </p:nvSpPr>
+        <p:spPr>
+          <a:xfrm>
+            <a:off x="3214116" y="1764792"/>
+            <a:ext cx="73152" cy="2596896"/>
           </a:xfrm>
           <a:prstGeom prst="rect">
             <a:avLst/>
@@ -4067,14 +4240,14 @@
       </p:sp>
       <p:sp>
         <p:nvSpPr>
-          <p:cNvPr id="12" name="Text 10"/>
-          <p:cNvSpPr/>
-          <p:nvPr/>
-        </p:nvSpPr>
-        <p:spPr>
-          <a:xfrm>
-            <a:off x="3438144" y="1837944"/>
-            <a:ext cx="2157984" cy="384048"/>
+          <p:cNvPr id="14" name="Text 12"/>
+          <p:cNvSpPr/>
+          <p:nvPr/>
+        </p:nvSpPr>
+        <p:spPr>
+          <a:xfrm>
+            <a:off x="3456432" y="1828800"/>
+            <a:ext cx="2139696" cy="384048"/>
           </a:xfrm>
           <a:prstGeom prst="rect">
             <a:avLst/>
@@ -4090,7 +4263,7 @@
               <a:buNone/>
             </a:pPr>
             <a:r>
-              <a:rPr lang="en-US" sz="1500" b="1" dirty="0">
+              <a:rPr lang="en-US" sz="1500" b="1" spc="50" kern="0" dirty="0">
                 <a:solidFill>
                   <a:srgbClr val="34D399"/>
                 </a:solidFill>
@@ -4106,14 +4279,34 @@
       </p:sp>
       <p:sp>
         <p:nvSpPr>
-          <p:cNvPr id="13" name="Text 11"/>
-          <p:cNvSpPr/>
-          <p:nvPr/>
-        </p:nvSpPr>
-        <p:spPr>
-          <a:xfrm>
-            <a:off x="3438144" y="2276856"/>
-            <a:ext cx="2084832" cy="2011680"/>
+          <p:cNvPr id="15" name="Shape 13"/>
+          <p:cNvSpPr/>
+          <p:nvPr/>
+        </p:nvSpPr>
+        <p:spPr>
+          <a:xfrm>
+            <a:off x="3456432" y="2221992"/>
+            <a:ext cx="2029968" cy="16459"/>
+          </a:xfrm>
+          <a:prstGeom prst="rect">
+            <a:avLst/>
+          </a:prstGeom>
+          <a:solidFill>
+            <a:srgbClr val="264862"/>
+          </a:solidFill>
+          <a:ln/>
+        </p:spPr>
+      </p:sp>
+      <p:sp>
+        <p:nvSpPr>
+          <p:cNvPr id="16" name="Text 14"/>
+          <p:cNvSpPr/>
+          <p:nvPr/>
+        </p:nvSpPr>
+        <p:spPr>
+          <a:xfrm>
+            <a:off x="3456432" y="2331720"/>
+            <a:ext cx="2066544" cy="1956816"/>
           </a:xfrm>
           <a:prstGeom prst="rect">
             <a:avLst/>
@@ -4135,7 +4328,7 @@
             <a:r>
               <a:rPr lang="en-US" sz="1250" dirty="0">
                 <a:solidFill>
-                  <a:srgbClr val="E8EEF5"/>
+                  <a:srgbClr val="EAF1F8"/>
                 </a:solidFill>
                 <a:latin typeface="Calibri" pitchFamily="34" charset="0"/>
                 <a:ea typeface="Calibri" pitchFamily="34" charset="-122"/>
@@ -4156,7 +4349,7 @@
             <a:r>
               <a:rPr lang="en-US" sz="1250" dirty="0">
                 <a:solidFill>
-                  <a:srgbClr val="E8EEF5"/>
+                  <a:srgbClr val="EAF1F8"/>
                 </a:solidFill>
                 <a:latin typeface="Calibri" pitchFamily="34" charset="0"/>
                 <a:ea typeface="Calibri" pitchFamily="34" charset="-122"/>
@@ -4177,7 +4370,7 @@
             <a:r>
               <a:rPr lang="en-US" sz="1250" dirty="0">
                 <a:solidFill>
-                  <a:srgbClr val="E8EEF5"/>
+                  <a:srgbClr val="EAF1F8"/>
                 </a:solidFill>
                 <a:latin typeface="Calibri" pitchFamily="34" charset="0"/>
                 <a:ea typeface="Calibri" pitchFamily="34" charset="-122"/>
@@ -4191,7 +4384,7 @@
       </p:sp>
       <p:sp>
         <p:nvSpPr>
-          <p:cNvPr id="14" name="Shape 12"/>
+          <p:cNvPr id="17" name="Shape 15"/>
           <p:cNvSpPr/>
           <p:nvPr/>
         </p:nvSpPr>
@@ -4200,11 +4393,13 @@
             <a:off x="5669280" y="1691640"/>
             <a:ext cx="2542032" cy="2743200"/>
           </a:xfrm>
-          <a:prstGeom prst="rect">
-            <a:avLst/>
+          <a:prstGeom prst="roundRect">
+            <a:avLst>
+              <a:gd name="adj" fmla="val 1799"/>
+            </a:avLst>
           </a:prstGeom>
           <a:solidFill>
-            <a:srgbClr val="12293D"/>
+            <a:srgbClr val="13283C"/>
           </a:solidFill>
           <a:ln w="15875">
             <a:solidFill>
@@ -4212,18 +4407,25 @@
             </a:solidFill>
             <a:prstDash val="solid"/>
           </a:ln>
-        </p:spPr>
-      </p:sp>
-      <p:sp>
-        <p:nvSpPr>
-          <p:cNvPr id="15" name="Shape 13"/>
-          <p:cNvSpPr/>
-          <p:nvPr/>
-        </p:nvSpPr>
-        <p:spPr>
-          <a:xfrm>
-            <a:off x="5669280" y="1691640"/>
-            <a:ext cx="82296" cy="2743200"/>
+          <a:effectLst>
+            <a:outerShdw sx="100000" sy="100000" kx="0" ky="0" algn="bl" rotWithShape="0" blurRad="88900" dist="38100" dir="5400000">
+              <a:srgbClr val="000000">
+                <a:alpha val="50000"/>
+              </a:srgbClr>
+            </a:outerShdw>
+          </a:effectLst>
+        </p:spPr>
+      </p:sp>
+      <p:sp>
+        <p:nvSpPr>
+          <p:cNvPr id="18" name="Shape 16"/>
+          <p:cNvSpPr/>
+          <p:nvPr/>
+        </p:nvSpPr>
+        <p:spPr>
+          <a:xfrm>
+            <a:off x="5682996" y="1764792"/>
+            <a:ext cx="73152" cy="2596896"/>
           </a:xfrm>
           <a:prstGeom prst="rect">
             <a:avLst/>
@@ -4236,14 +4438,14 @@
       </p:sp>
       <p:sp>
         <p:nvSpPr>
-          <p:cNvPr id="16" name="Text 14"/>
-          <p:cNvSpPr/>
-          <p:nvPr/>
-        </p:nvSpPr>
-        <p:spPr>
-          <a:xfrm>
-            <a:off x="5907024" y="1837944"/>
-            <a:ext cx="2157984" cy="384048"/>
+          <p:cNvPr id="19" name="Text 17"/>
+          <p:cNvSpPr/>
+          <p:nvPr/>
+        </p:nvSpPr>
+        <p:spPr>
+          <a:xfrm>
+            <a:off x="5925312" y="1828800"/>
+            <a:ext cx="2139696" cy="384048"/>
           </a:xfrm>
           <a:prstGeom prst="rect">
             <a:avLst/>
@@ -4259,7 +4461,7 @@
               <a:buNone/>
             </a:pPr>
             <a:r>
-              <a:rPr lang="en-US" sz="1500" b="1" dirty="0">
+              <a:rPr lang="en-US" sz="1500" b="1" spc="50" kern="0" dirty="0">
                 <a:solidFill>
                   <a:srgbClr val="FBBF24"/>
                 </a:solidFill>
@@ -4275,14 +4477,34 @@
       </p:sp>
       <p:sp>
         <p:nvSpPr>
-          <p:cNvPr id="17" name="Text 15"/>
-          <p:cNvSpPr/>
-          <p:nvPr/>
-        </p:nvSpPr>
-        <p:spPr>
-          <a:xfrm>
-            <a:off x="5907024" y="2276856"/>
-            <a:ext cx="2084832" cy="2011680"/>
+          <p:cNvPr id="20" name="Shape 18"/>
+          <p:cNvSpPr/>
+          <p:nvPr/>
+        </p:nvSpPr>
+        <p:spPr>
+          <a:xfrm>
+            <a:off x="5925312" y="2221992"/>
+            <a:ext cx="2029968" cy="16459"/>
+          </a:xfrm>
+          <a:prstGeom prst="rect">
+            <a:avLst/>
+          </a:prstGeom>
+          <a:solidFill>
+            <a:srgbClr val="264862"/>
+          </a:solidFill>
+          <a:ln/>
+        </p:spPr>
+      </p:sp>
+      <p:sp>
+        <p:nvSpPr>
+          <p:cNvPr id="21" name="Text 19"/>
+          <p:cNvSpPr/>
+          <p:nvPr/>
+        </p:nvSpPr>
+        <p:spPr>
+          <a:xfrm>
+            <a:off x="5925312" y="2331720"/>
+            <a:ext cx="2066544" cy="1956816"/>
           </a:xfrm>
           <a:prstGeom prst="rect">
             <a:avLst/>
@@ -4304,7 +4526,7 @@
             <a:r>
               <a:rPr lang="en-US" sz="1250" dirty="0">
                 <a:solidFill>
-                  <a:srgbClr val="E8EEF5"/>
+                  <a:srgbClr val="EAF1F8"/>
                 </a:solidFill>
                 <a:latin typeface="Calibri" pitchFamily="34" charset="0"/>
                 <a:ea typeface="Calibri" pitchFamily="34" charset="-122"/>
@@ -4325,7 +4547,7 @@
             <a:r>
               <a:rPr lang="en-US" sz="1250" dirty="0">
                 <a:solidFill>
-                  <a:srgbClr val="E8EEF5"/>
+                  <a:srgbClr val="EAF1F8"/>
                 </a:solidFill>
                 <a:latin typeface="Calibri" pitchFamily="34" charset="0"/>
                 <a:ea typeface="Calibri" pitchFamily="34" charset="-122"/>
@@ -4346,7 +4568,7 @@
             <a:r>
               <a:rPr lang="en-US" sz="1250" dirty="0">
                 <a:solidFill>
-                  <a:srgbClr val="E8EEF5"/>
+                  <a:srgbClr val="EAF1F8"/>
                 </a:solidFill>
                 <a:latin typeface="Calibri" pitchFamily="34" charset="0"/>
                 <a:ea typeface="Calibri" pitchFamily="34" charset="-122"/>
@@ -4372,7 +4594,7 @@
     <p:bg>
       <p:bgPr>
         <a:solidFill>
-          <a:srgbClr val="0B1B2B"/>
+          <a:srgbClr val="0A1622"/>
         </a:solidFill>
       </p:bgPr>
     </p:bg>
@@ -4410,6 +4632,13 @@
             <a:srgbClr val="22D3EE"/>
           </a:solidFill>
           <a:ln/>
+          <a:effectLst>
+            <a:outerShdw sx="100000" sy="100000" kx="0" ky="0" algn="bl" rotWithShape="0" blurRad="50800" dist="25400" dir="5400000">
+              <a:srgbClr val="000000">
+                <a:alpha val="40000"/>
+              </a:srgbClr>
+            </a:outerShdw>
+          </a:effectLst>
         </p:spPr>
       </p:sp>
       <p:sp>
@@ -4439,7 +4668,7 @@
             <a:r>
               <a:rPr lang="en-US" sz="2200" b="1" dirty="0">
                 <a:solidFill>
-                  <a:srgbClr val="0B1B2B"/>
+                  <a:srgbClr val="0A1622"/>
                 </a:solidFill>
                 <a:latin typeface="Consolas" pitchFamily="34" charset="0"/>
                 <a:ea typeface="Consolas" pitchFamily="34" charset="-122"/>
@@ -4528,6 +4757,26 @@
             <a:endParaRPr lang="en-US" sz="2500" dirty="0"/>
           </a:p>
         </p:txBody>
+      </p:sp>
+      <p:sp>
+        <p:nvSpPr>
+          <p:cNvPr id="6" name="Shape 4"/>
+          <p:cNvSpPr/>
+          <p:nvPr/>
+        </p:nvSpPr>
+        <p:spPr>
+          <a:xfrm>
+            <a:off x="1298448" y="1316736"/>
+            <a:ext cx="1005840" cy="32004"/>
+          </a:xfrm>
+          <a:prstGeom prst="rect">
+            <a:avLst/>
+          </a:prstGeom>
+          <a:solidFill>
+            <a:srgbClr val="22D3EE"/>
+          </a:solidFill>
+          <a:ln/>
+        </p:spPr>
       </p:sp>
       <p:graphicFrame>
         <p:nvGraphicFramePr>
@@ -4567,7 +4816,7 @@
                       <a:r>
                         <a:rPr lang="en-US" sz="1250" b="1" dirty="0">
                           <a:solidFill>
-                            <a:srgbClr val="0B1B2B"/>
+                            <a:srgbClr val="0A1622"/>
                           </a:solidFill>
                           <a:latin typeface="Calibri" pitchFamily="34" charset="0"/>
                           <a:ea typeface="Calibri" pitchFamily="34" charset="-122"/>
@@ -4582,10 +4831,10 @@
                       </a:endParaRPr>
                     </a:p>
                   </a:txBody>
-                  <a:tcPr marL="50800" marR="50800" marT="50800" marB="50800" anchor="ctr">
+                  <a:tcPr marL="76200" marR="76200" marT="76200" marB="76200" anchor="ctr">
                     <a:lnL w="12700" cap="flat" cmpd="sng" algn="ctr">
                       <a:solidFill>
-                        <a:srgbClr val="284963"/>
+                        <a:srgbClr val="264862"/>
                       </a:solidFill>
                       <a:prstDash val="solid"/>
                       <a:round/>
@@ -4594,7 +4843,7 @@
                     </a:lnL>
                     <a:lnR w="12700" cap="flat" cmpd="sng" algn="ctr">
                       <a:solidFill>
-                        <a:srgbClr val="284963"/>
+                        <a:srgbClr val="264862"/>
                       </a:solidFill>
                       <a:prstDash val="solid"/>
                       <a:round/>
@@ -4603,7 +4852,7 @@
                     </a:lnR>
                     <a:lnT w="12700" cap="flat" cmpd="sng" algn="ctr">
                       <a:solidFill>
-                        <a:srgbClr val="284963"/>
+                        <a:srgbClr val="264862"/>
                       </a:solidFill>
                       <a:prstDash val="solid"/>
                       <a:round/>
@@ -4612,7 +4861,7 @@
                     </a:lnT>
                     <a:lnB w="12700" cap="flat" cmpd="sng" algn="ctr">
                       <a:solidFill>
-                        <a:srgbClr val="284963"/>
+                        <a:srgbClr val="264862"/>
                       </a:solidFill>
                       <a:prstDash val="solid"/>
                       <a:round/>
@@ -4635,7 +4884,7 @@
                       <a:r>
                         <a:rPr lang="en-US" sz="1250" b="1" dirty="0">
                           <a:solidFill>
-                            <a:srgbClr val="0B1B2B"/>
+                            <a:srgbClr val="0A1622"/>
                           </a:solidFill>
                           <a:latin typeface="Calibri" pitchFamily="34" charset="0"/>
                           <a:ea typeface="Calibri" pitchFamily="34" charset="-122"/>
@@ -4650,10 +4899,10 @@
                       </a:endParaRPr>
                     </a:p>
                   </a:txBody>
-                  <a:tcPr marL="50800" marR="50800" marT="50800" marB="50800" anchor="ctr">
+                  <a:tcPr marL="76200" marR="76200" marT="76200" marB="76200" anchor="ctr">
                     <a:lnL w="12700" cap="flat" cmpd="sng" algn="ctr">
                       <a:solidFill>
-                        <a:srgbClr val="284963"/>
+                        <a:srgbClr val="264862"/>
                       </a:solidFill>
                       <a:prstDash val="solid"/>
                       <a:round/>
@@ -4662,7 +4911,7 @@
                     </a:lnL>
                     <a:lnR w="12700" cap="flat" cmpd="sng" algn="ctr">
                       <a:solidFill>
-                        <a:srgbClr val="284963"/>
+                        <a:srgbClr val="264862"/>
                       </a:solidFill>
                       <a:prstDash val="solid"/>
                       <a:round/>
@@ -4671,7 +4920,7 @@
                     </a:lnR>
                     <a:lnT w="12700" cap="flat" cmpd="sng" algn="ctr">
                       <a:solidFill>
-                        <a:srgbClr val="284963"/>
+                        <a:srgbClr val="264862"/>
                       </a:solidFill>
                       <a:prstDash val="solid"/>
                       <a:round/>
@@ -4680,7 +4929,7 @@
                     </a:lnT>
                     <a:lnB w="12700" cap="flat" cmpd="sng" algn="ctr">
                       <a:solidFill>
-                        <a:srgbClr val="284963"/>
+                        <a:srgbClr val="264862"/>
                       </a:solidFill>
                       <a:prstDash val="solid"/>
                       <a:round/>
@@ -4705,7 +4954,7 @@
                       <a:r>
                         <a:rPr lang="en-US" sz="1150" dirty="0">
                           <a:solidFill>
-                            <a:srgbClr val="E8EEF5"/>
+                            <a:srgbClr val="EAF1F8"/>
                           </a:solidFill>
                           <a:latin typeface="Calibri" pitchFamily="34" charset="0"/>
                           <a:ea typeface="Calibri" pitchFamily="34" charset="-122"/>
@@ -4720,10 +4969,10 @@
                       </a:endParaRPr>
                     </a:p>
                   </a:txBody>
-                  <a:tcPr marL="50800" marR="50800" marT="50800" marB="50800" anchor="ctr">
+                  <a:tcPr marL="76200" marR="76200" marT="76200" marB="76200" anchor="ctr">
                     <a:lnL w="12700" cap="flat" cmpd="sng" algn="ctr">
                       <a:solidFill>
-                        <a:srgbClr val="284963"/>
+                        <a:srgbClr val="264862"/>
                       </a:solidFill>
                       <a:prstDash val="solid"/>
                       <a:round/>
@@ -4732,7 +4981,7 @@
                     </a:lnL>
                     <a:lnR w="12700" cap="flat" cmpd="sng" algn="ctr">
                       <a:solidFill>
-                        <a:srgbClr val="284963"/>
+                        <a:srgbClr val="264862"/>
                       </a:solidFill>
                       <a:prstDash val="solid"/>
                       <a:round/>
@@ -4741,7 +4990,7 @@
                     </a:lnR>
                     <a:lnT w="12700" cap="flat" cmpd="sng" algn="ctr">
                       <a:solidFill>
-                        <a:srgbClr val="284963"/>
+                        <a:srgbClr val="264862"/>
                       </a:solidFill>
                       <a:prstDash val="solid"/>
                       <a:round/>
@@ -4750,7 +4999,7 @@
                     </a:lnT>
                     <a:lnB w="12700" cap="flat" cmpd="sng" algn="ctr">
                       <a:solidFill>
-                        <a:srgbClr val="284963"/>
+                        <a:srgbClr val="264862"/>
                       </a:solidFill>
                       <a:prstDash val="solid"/>
                       <a:round/>
@@ -4758,7 +5007,7 @@
                       <a:tailEnd type="none" w="med" len="med"/>
                     </a:lnB>
                     <a:solidFill>
-                      <a:srgbClr val="16314A"/>
+                      <a:srgbClr val="0F2133"/>
                     </a:solidFill>
                   </a:tcPr>
                 </a:tc>
@@ -4773,7 +5022,7 @@
                       <a:r>
                         <a:rPr lang="en-US" sz="1150" dirty="0">
                           <a:solidFill>
-                            <a:srgbClr val="E8EEF5"/>
+                            <a:srgbClr val="EAF1F8"/>
                           </a:solidFill>
                           <a:latin typeface="Calibri" pitchFamily="34" charset="0"/>
                           <a:ea typeface="Calibri" pitchFamily="34" charset="-122"/>
@@ -4788,10 +5037,10 @@
                       </a:endParaRPr>
                     </a:p>
                   </a:txBody>
-                  <a:tcPr marL="50800" marR="50800" marT="50800" marB="50800" anchor="ctr">
+                  <a:tcPr marL="76200" marR="76200" marT="76200" marB="76200" anchor="ctr">
                     <a:lnL w="12700" cap="flat" cmpd="sng" algn="ctr">
                       <a:solidFill>
-                        <a:srgbClr val="284963"/>
+                        <a:srgbClr val="264862"/>
                       </a:solidFill>
                       <a:prstDash val="solid"/>
                       <a:round/>
@@ -4800,7 +5049,7 @@
                     </a:lnL>
                     <a:lnR w="12700" cap="flat" cmpd="sng" algn="ctr">
                       <a:solidFill>
-                        <a:srgbClr val="284963"/>
+                        <a:srgbClr val="264862"/>
                       </a:solidFill>
                       <a:prstDash val="solid"/>
                       <a:round/>
@@ -4809,7 +5058,7 @@
                     </a:lnR>
                     <a:lnT w="12700" cap="flat" cmpd="sng" algn="ctr">
                       <a:solidFill>
-                        <a:srgbClr val="284963"/>
+                        <a:srgbClr val="264862"/>
                       </a:solidFill>
                       <a:prstDash val="solid"/>
                       <a:round/>
@@ -4818,7 +5067,7 @@
                     </a:lnT>
                     <a:lnB w="12700" cap="flat" cmpd="sng" algn="ctr">
                       <a:solidFill>
-                        <a:srgbClr val="284963"/>
+                        <a:srgbClr val="264862"/>
                       </a:solidFill>
                       <a:prstDash val="solid"/>
                       <a:round/>
@@ -4826,7 +5075,7 @@
                       <a:tailEnd type="none" w="med" len="med"/>
                     </a:lnB>
                     <a:solidFill>
-                      <a:srgbClr val="16314A"/>
+                      <a:srgbClr val="0F2133"/>
                     </a:solidFill>
                   </a:tcPr>
                 </a:tc>
@@ -4843,7 +5092,7 @@
                       <a:r>
                         <a:rPr lang="en-US" sz="1150" dirty="0">
                           <a:solidFill>
-                            <a:srgbClr val="E8EEF5"/>
+                            <a:srgbClr val="EAF1F8"/>
                           </a:solidFill>
                           <a:latin typeface="Calibri" pitchFamily="34" charset="0"/>
                           <a:ea typeface="Calibri" pitchFamily="34" charset="-122"/>
@@ -4858,10 +5107,10 @@
                       </a:endParaRPr>
                     </a:p>
                   </a:txBody>
-                  <a:tcPr marL="50800" marR="50800" marT="50800" marB="50800" anchor="ctr">
+                  <a:tcPr marL="76200" marR="76200" marT="76200" marB="76200" anchor="ctr">
                     <a:lnL w="12700" cap="flat" cmpd="sng" algn="ctr">
                       <a:solidFill>
-                        <a:srgbClr val="284963"/>
+                        <a:srgbClr val="264862"/>
                       </a:solidFill>
                       <a:prstDash val="solid"/>
                       <a:round/>
@@ -4870,7 +5119,7 @@
                     </a:lnL>
                     <a:lnR w="12700" cap="flat" cmpd="sng" algn="ctr">
                       <a:solidFill>
-                        <a:srgbClr val="284963"/>
+                        <a:srgbClr val="264862"/>
                       </a:solidFill>
                       <a:prstDash val="solid"/>
                       <a:round/>
@@ -4879,7 +5128,7 @@
                     </a:lnR>
                     <a:lnT w="12700" cap="flat" cmpd="sng" algn="ctr">
                       <a:solidFill>
-                        <a:srgbClr val="284963"/>
+                        <a:srgbClr val="264862"/>
                       </a:solidFill>
                       <a:prstDash val="solid"/>
                       <a:round/>
@@ -4888,7 +5137,7 @@
                     </a:lnT>
                     <a:lnB w="12700" cap="flat" cmpd="sng" algn="ctr">
                       <a:solidFill>
-                        <a:srgbClr val="284963"/>
+                        <a:srgbClr val="264862"/>
                       </a:solidFill>
                       <a:prstDash val="solid"/>
                       <a:round/>
@@ -4896,7 +5145,7 @@
                       <a:tailEnd type="none" w="med" len="med"/>
                     </a:lnB>
                     <a:solidFill>
-                      <a:srgbClr val="12293D"/>
+                      <a:srgbClr val="13283C"/>
                     </a:solidFill>
                   </a:tcPr>
                 </a:tc>
@@ -4911,7 +5160,7 @@
                       <a:r>
                         <a:rPr lang="en-US" sz="1150" dirty="0">
                           <a:solidFill>
-                            <a:srgbClr val="E8EEF5"/>
+                            <a:srgbClr val="EAF1F8"/>
                           </a:solidFill>
                           <a:latin typeface="Calibri" pitchFamily="34" charset="0"/>
                           <a:ea typeface="Calibri" pitchFamily="34" charset="-122"/>
@@ -4926,10 +5175,10 @@
                       </a:endParaRPr>
                     </a:p>
                   </a:txBody>
-                  <a:tcPr marL="50800" marR="50800" marT="50800" marB="50800" anchor="ctr">
+                  <a:tcPr marL="76200" marR="76200" marT="76200" marB="76200" anchor="ctr">
                     <a:lnL w="12700" cap="flat" cmpd="sng" algn="ctr">
                       <a:solidFill>
-                        <a:srgbClr val="284963"/>
+                        <a:srgbClr val="264862"/>
                       </a:solidFill>
                       <a:prstDash val="solid"/>
                       <a:round/>
@@ -4938,7 +5187,7 @@
                     </a:lnL>
                     <a:lnR w="12700" cap="flat" cmpd="sng" algn="ctr">
                       <a:solidFill>
-                        <a:srgbClr val="284963"/>
+                        <a:srgbClr val="264862"/>
                       </a:solidFill>
                       <a:prstDash val="solid"/>
                       <a:round/>
@@ -4947,7 +5196,7 @@
                     </a:lnR>
                     <a:lnT w="12700" cap="flat" cmpd="sng" algn="ctr">
                       <a:solidFill>
-                        <a:srgbClr val="284963"/>
+                        <a:srgbClr val="264862"/>
                       </a:solidFill>
                       <a:prstDash val="solid"/>
                       <a:round/>
@@ -4956,7 +5205,7 @@
                     </a:lnT>
                     <a:lnB w="12700" cap="flat" cmpd="sng" algn="ctr">
                       <a:solidFill>
-                        <a:srgbClr val="284963"/>
+                        <a:srgbClr val="264862"/>
                       </a:solidFill>
                       <a:prstDash val="solid"/>
                       <a:round/>
@@ -4964,7 +5213,7 @@
                       <a:tailEnd type="none" w="med" len="med"/>
                     </a:lnB>
                     <a:solidFill>
-                      <a:srgbClr val="12293D"/>
+                      <a:srgbClr val="13283C"/>
                     </a:solidFill>
                   </a:tcPr>
                 </a:tc>
@@ -4981,7 +5230,7 @@
                       <a:r>
                         <a:rPr lang="en-US" sz="1150" dirty="0">
                           <a:solidFill>
-                            <a:srgbClr val="E8EEF5"/>
+                            <a:srgbClr val="EAF1F8"/>
                           </a:solidFill>
                           <a:latin typeface="Calibri" pitchFamily="34" charset="0"/>
                           <a:ea typeface="Calibri" pitchFamily="34" charset="-122"/>
@@ -4996,10 +5245,10 @@
                       </a:endParaRPr>
                     </a:p>
                   </a:txBody>
-                  <a:tcPr marL="50800" marR="50800" marT="50800" marB="50800" anchor="ctr">
+                  <a:tcPr marL="76200" marR="76200" marT="76200" marB="76200" anchor="ctr">
                     <a:lnL w="12700" cap="flat" cmpd="sng" algn="ctr">
                       <a:solidFill>
-                        <a:srgbClr val="284963"/>
+                        <a:srgbClr val="264862"/>
                       </a:solidFill>
                       <a:prstDash val="solid"/>
                       <a:round/>
@@ -5008,7 +5257,7 @@
                     </a:lnL>
                     <a:lnR w="12700" cap="flat" cmpd="sng" algn="ctr">
                       <a:solidFill>
-                        <a:srgbClr val="284963"/>
+                        <a:srgbClr val="264862"/>
                       </a:solidFill>
                       <a:prstDash val="solid"/>
                       <a:round/>
@@ -5017,7 +5266,7 @@
                     </a:lnR>
                     <a:lnT w="12700" cap="flat" cmpd="sng" algn="ctr">
                       <a:solidFill>
-                        <a:srgbClr val="284963"/>
+                        <a:srgbClr val="264862"/>
                       </a:solidFill>
                       <a:prstDash val="solid"/>
                       <a:round/>
@@ -5026,7 +5275,7 @@
                     </a:lnT>
                     <a:lnB w="12700" cap="flat" cmpd="sng" algn="ctr">
                       <a:solidFill>
-                        <a:srgbClr val="284963"/>
+                        <a:srgbClr val="264862"/>
                       </a:solidFill>
                       <a:prstDash val="solid"/>
                       <a:round/>
@@ -5034,7 +5283,7 @@
                       <a:tailEnd type="none" w="med" len="med"/>
                     </a:lnB>
                     <a:solidFill>
-                      <a:srgbClr val="16314A"/>
+                      <a:srgbClr val="0F2133"/>
                     </a:solidFill>
                   </a:tcPr>
                 </a:tc>
@@ -5049,7 +5298,7 @@
                       <a:r>
                         <a:rPr lang="en-US" sz="1150" dirty="0">
                           <a:solidFill>
-                            <a:srgbClr val="E8EEF5"/>
+                            <a:srgbClr val="EAF1F8"/>
                           </a:solidFill>
                           <a:latin typeface="Calibri" pitchFamily="34" charset="0"/>
                           <a:ea typeface="Calibri" pitchFamily="34" charset="-122"/>
@@ -5064,10 +5313,10 @@
                       </a:endParaRPr>
                     </a:p>
                   </a:txBody>
-                  <a:tcPr marL="50800" marR="50800" marT="50800" marB="50800" anchor="ctr">
+                  <a:tcPr marL="76200" marR="76200" marT="76200" marB="76200" anchor="ctr">
                     <a:lnL w="12700" cap="flat" cmpd="sng" algn="ctr">
                       <a:solidFill>
-                        <a:srgbClr val="284963"/>
+                        <a:srgbClr val="264862"/>
                       </a:solidFill>
                       <a:prstDash val="solid"/>
                       <a:round/>
@@ -5076,7 +5325,7 @@
                     </a:lnL>
                     <a:lnR w="12700" cap="flat" cmpd="sng" algn="ctr">
                       <a:solidFill>
-                        <a:srgbClr val="284963"/>
+                        <a:srgbClr val="264862"/>
                       </a:solidFill>
                       <a:prstDash val="solid"/>
                       <a:round/>
@@ -5085,7 +5334,7 @@
                     </a:lnR>
                     <a:lnT w="12700" cap="flat" cmpd="sng" algn="ctr">
                       <a:solidFill>
-                        <a:srgbClr val="284963"/>
+                        <a:srgbClr val="264862"/>
                       </a:solidFill>
                       <a:prstDash val="solid"/>
                       <a:round/>
@@ -5094,7 +5343,7 @@
                     </a:lnT>
                     <a:lnB w="12700" cap="flat" cmpd="sng" algn="ctr">
                       <a:solidFill>
-                        <a:srgbClr val="284963"/>
+                        <a:srgbClr val="264862"/>
                       </a:solidFill>
                       <a:prstDash val="solid"/>
                       <a:round/>
@@ -5102,7 +5351,7 @@
                       <a:tailEnd type="none" w="med" len="med"/>
                     </a:lnB>
                     <a:solidFill>
-                      <a:srgbClr val="16314A"/>
+                      <a:srgbClr val="0F2133"/>
                     </a:solidFill>
                   </a:tcPr>
                 </a:tc>
@@ -5119,7 +5368,7 @@
                       <a:r>
                         <a:rPr lang="en-US" sz="1150" dirty="0">
                           <a:solidFill>
-                            <a:srgbClr val="E8EEF5"/>
+                            <a:srgbClr val="EAF1F8"/>
                           </a:solidFill>
                           <a:latin typeface="Calibri" pitchFamily="34" charset="0"/>
                           <a:ea typeface="Calibri" pitchFamily="34" charset="-122"/>
@@ -5134,10 +5383,10 @@
                       </a:endParaRPr>
                     </a:p>
                   </a:txBody>
-                  <a:tcPr marL="50800" marR="50800" marT="50800" marB="50800" anchor="ctr">
+                  <a:tcPr marL="76200" marR="76200" marT="76200" marB="76200" anchor="ctr">
                     <a:lnL w="12700" cap="flat" cmpd="sng" algn="ctr">
                       <a:solidFill>
-                        <a:srgbClr val="284963"/>
+                        <a:srgbClr val="264862"/>
                       </a:solidFill>
                       <a:prstDash val="solid"/>
                       <a:round/>
@@ -5146,7 +5395,7 @@
                     </a:lnL>
                     <a:lnR w="12700" cap="flat" cmpd="sng" algn="ctr">
                       <a:solidFill>
-                        <a:srgbClr val="284963"/>
+                        <a:srgbClr val="264862"/>
                       </a:solidFill>
                       <a:prstDash val="solid"/>
                       <a:round/>
@@ -5155,7 +5404,7 @@
                     </a:lnR>
                     <a:lnT w="12700" cap="flat" cmpd="sng" algn="ctr">
                       <a:solidFill>
-                        <a:srgbClr val="284963"/>
+                        <a:srgbClr val="264862"/>
                       </a:solidFill>
                       <a:prstDash val="solid"/>
                       <a:round/>
@@ -5164,7 +5413,7 @@
                     </a:lnT>
                     <a:lnB w="12700" cap="flat" cmpd="sng" algn="ctr">
                       <a:solidFill>
-                        <a:srgbClr val="284963"/>
+                        <a:srgbClr val="264862"/>
                       </a:solidFill>
                       <a:prstDash val="solid"/>
                       <a:round/>
@@ -5172,7 +5421,7 @@
                       <a:tailEnd type="none" w="med" len="med"/>
                     </a:lnB>
                     <a:solidFill>
-                      <a:srgbClr val="12293D"/>
+                      <a:srgbClr val="13283C"/>
                     </a:solidFill>
                   </a:tcPr>
                 </a:tc>
@@ -5187,7 +5436,7 @@
                       <a:r>
                         <a:rPr lang="en-US" sz="1150" dirty="0">
                           <a:solidFill>
-                            <a:srgbClr val="E8EEF5"/>
+                            <a:srgbClr val="EAF1F8"/>
                           </a:solidFill>
                           <a:latin typeface="Calibri" pitchFamily="34" charset="0"/>
                           <a:ea typeface="Calibri" pitchFamily="34" charset="-122"/>
@@ -5202,10 +5451,10 @@
                       </a:endParaRPr>
                     </a:p>
                   </a:txBody>
-                  <a:tcPr marL="50800" marR="50800" marT="50800" marB="50800" anchor="ctr">
+                  <a:tcPr marL="76200" marR="76200" marT="76200" marB="76200" anchor="ctr">
                     <a:lnL w="12700" cap="flat" cmpd="sng" algn="ctr">
                       <a:solidFill>
-                        <a:srgbClr val="284963"/>
+                        <a:srgbClr val="264862"/>
                       </a:solidFill>
                       <a:prstDash val="solid"/>
                       <a:round/>
@@ -5214,7 +5463,7 @@
                     </a:lnL>
                     <a:lnR w="12700" cap="flat" cmpd="sng" algn="ctr">
                       <a:solidFill>
-                        <a:srgbClr val="284963"/>
+                        <a:srgbClr val="264862"/>
                       </a:solidFill>
                       <a:prstDash val="solid"/>
                       <a:round/>
@@ -5223,7 +5472,7 @@
                     </a:lnR>
                     <a:lnT w="12700" cap="flat" cmpd="sng" algn="ctr">
                       <a:solidFill>
-                        <a:srgbClr val="284963"/>
+                        <a:srgbClr val="264862"/>
                       </a:solidFill>
                       <a:prstDash val="solid"/>
                       <a:round/>
@@ -5232,7 +5481,7 @@
                     </a:lnT>
                     <a:lnB w="12700" cap="flat" cmpd="sng" algn="ctr">
                       <a:solidFill>
-                        <a:srgbClr val="284963"/>
+                        <a:srgbClr val="264862"/>
                       </a:solidFill>
                       <a:prstDash val="solid"/>
                       <a:round/>
@@ -5240,7 +5489,7 @@
                       <a:tailEnd type="none" w="med" len="med"/>
                     </a:lnB>
                     <a:solidFill>
-                      <a:srgbClr val="12293D"/>
+                      <a:srgbClr val="13283C"/>
                     </a:solidFill>
                   </a:tcPr>
                 </a:tc>
@@ -5257,7 +5506,7 @@
                       <a:r>
                         <a:rPr lang="en-US" sz="1150" dirty="0">
                           <a:solidFill>
-                            <a:srgbClr val="E8EEF5"/>
+                            <a:srgbClr val="EAF1F8"/>
                           </a:solidFill>
                           <a:latin typeface="Calibri" pitchFamily="34" charset="0"/>
                           <a:ea typeface="Calibri" pitchFamily="34" charset="-122"/>
@@ -5272,10 +5521,10 @@
                       </a:endParaRPr>
                     </a:p>
                   </a:txBody>
-                  <a:tcPr marL="50800" marR="50800" marT="50800" marB="50800" anchor="ctr">
+                  <a:tcPr marL="76200" marR="76200" marT="76200" marB="76200" anchor="ctr">
                     <a:lnL w="12700" cap="flat" cmpd="sng" algn="ctr">
                       <a:solidFill>
-                        <a:srgbClr val="284963"/>
+                        <a:srgbClr val="264862"/>
                       </a:solidFill>
                       <a:prstDash val="solid"/>
                       <a:round/>
@@ -5284,7 +5533,7 @@
                     </a:lnL>
                     <a:lnR w="12700" cap="flat" cmpd="sng" algn="ctr">
                       <a:solidFill>
-                        <a:srgbClr val="284963"/>
+                        <a:srgbClr val="264862"/>
                       </a:solidFill>
                       <a:prstDash val="solid"/>
                       <a:round/>
@@ -5293,7 +5542,7 @@
                     </a:lnR>
                     <a:lnT w="12700" cap="flat" cmpd="sng" algn="ctr">
                       <a:solidFill>
-                        <a:srgbClr val="284963"/>
+                        <a:srgbClr val="264862"/>
                       </a:solidFill>
                       <a:prstDash val="solid"/>
                       <a:round/>
@@ -5302,7 +5551,7 @@
                     </a:lnT>
                     <a:lnB w="12700" cap="flat" cmpd="sng" algn="ctr">
                       <a:solidFill>
-                        <a:srgbClr val="284963"/>
+                        <a:srgbClr val="264862"/>
                       </a:solidFill>
                       <a:prstDash val="solid"/>
                       <a:round/>
@@ -5310,7 +5559,7 @@
                       <a:tailEnd type="none" w="med" len="med"/>
                     </a:lnB>
                     <a:solidFill>
-                      <a:srgbClr val="16314A"/>
+                      <a:srgbClr val="0F2133"/>
                     </a:solidFill>
                   </a:tcPr>
                 </a:tc>
@@ -5325,7 +5574,7 @@
                       <a:r>
                         <a:rPr lang="en-US" sz="1150" dirty="0">
                           <a:solidFill>
-                            <a:srgbClr val="E8EEF5"/>
+                            <a:srgbClr val="EAF1F8"/>
                           </a:solidFill>
                           <a:latin typeface="Calibri" pitchFamily="34" charset="0"/>
                           <a:ea typeface="Calibri" pitchFamily="34" charset="-122"/>
@@ -5340,10 +5589,10 @@
                       </a:endParaRPr>
                     </a:p>
                   </a:txBody>
-                  <a:tcPr marL="50800" marR="50800" marT="50800" marB="50800" anchor="ctr">
+                  <a:tcPr marL="76200" marR="76200" marT="76200" marB="76200" anchor="ctr">
                     <a:lnL w="12700" cap="flat" cmpd="sng" algn="ctr">
                       <a:solidFill>
-                        <a:srgbClr val="284963"/>
+                        <a:srgbClr val="264862"/>
                       </a:solidFill>
                       <a:prstDash val="solid"/>
                       <a:round/>
@@ -5352,7 +5601,7 @@
                     </a:lnL>
                     <a:lnR w="12700" cap="flat" cmpd="sng" algn="ctr">
                       <a:solidFill>
-                        <a:srgbClr val="284963"/>
+                        <a:srgbClr val="264862"/>
                       </a:solidFill>
                       <a:prstDash val="solid"/>
                       <a:round/>
@@ -5361,7 +5610,7 @@
                     </a:lnR>
                     <a:lnT w="12700" cap="flat" cmpd="sng" algn="ctr">
                       <a:solidFill>
-                        <a:srgbClr val="284963"/>
+                        <a:srgbClr val="264862"/>
                       </a:solidFill>
                       <a:prstDash val="solid"/>
                       <a:round/>
@@ -5370,7 +5619,7 @@
                     </a:lnT>
                     <a:lnB w="12700" cap="flat" cmpd="sng" algn="ctr">
                       <a:solidFill>
-                        <a:srgbClr val="284963"/>
+                        <a:srgbClr val="264862"/>
                       </a:solidFill>
                       <a:prstDash val="solid"/>
                       <a:round/>
@@ -5378,7 +5627,7 @@
                       <a:tailEnd type="none" w="med" len="med"/>
                     </a:lnB>
                     <a:solidFill>
-                      <a:srgbClr val="16314A"/>
+                      <a:srgbClr val="0F2133"/>
                     </a:solidFill>
                   </a:tcPr>
                 </a:tc>
@@ -5401,7 +5650,7 @@
     <p:bg>
       <p:bgPr>
         <a:solidFill>
-          <a:srgbClr val="0B1B2B"/>
+          <a:srgbClr val="0A1622"/>
         </a:solidFill>
       </p:bgPr>
     </p:bg>
@@ -5439,6 +5688,13 @@
             <a:srgbClr val="22D3EE"/>
           </a:solidFill>
           <a:ln/>
+          <a:effectLst>
+            <a:outerShdw sx="100000" sy="100000" kx="0" ky="0" algn="bl" rotWithShape="0" blurRad="50800" dist="25400" dir="5400000">
+              <a:srgbClr val="000000">
+                <a:alpha val="40000"/>
+              </a:srgbClr>
+            </a:outerShdw>
+          </a:effectLst>
         </p:spPr>
       </p:sp>
       <p:sp>
@@ -5468,7 +5724,7 @@
             <a:r>
               <a:rPr lang="en-US" sz="2200" b="1" dirty="0">
                 <a:solidFill>
-                  <a:srgbClr val="0B1B2B"/>
+                  <a:srgbClr val="0A1622"/>
                 </a:solidFill>
                 <a:latin typeface="Consolas" pitchFamily="34" charset="0"/>
                 <a:ea typeface="Consolas" pitchFamily="34" charset="-122"/>
@@ -5566,14 +5822,36 @@
         </p:nvSpPr>
         <p:spPr>
           <a:xfrm>
+            <a:off x="1298448" y="1316736"/>
+            <a:ext cx="1005840" cy="32004"/>
+          </a:xfrm>
+          <a:prstGeom prst="rect">
+            <a:avLst/>
+          </a:prstGeom>
+          <a:solidFill>
+            <a:srgbClr val="22D3EE"/>
+          </a:solidFill>
+          <a:ln/>
+        </p:spPr>
+      </p:sp>
+      <p:sp>
+        <p:nvSpPr>
+          <p:cNvPr id="7" name="Shape 5"/>
+          <p:cNvSpPr/>
+          <p:nvPr/>
+        </p:nvSpPr>
+        <p:spPr>
+          <a:xfrm>
             <a:off x="548640" y="1691640"/>
             <a:ext cx="3886200" cy="2743200"/>
           </a:xfrm>
-          <a:prstGeom prst="rect">
-            <a:avLst/>
+          <a:prstGeom prst="roundRect">
+            <a:avLst>
+              <a:gd name="adj" fmla="val 1667"/>
+            </a:avLst>
           </a:prstGeom>
           <a:solidFill>
-            <a:srgbClr val="12293D"/>
+            <a:srgbClr val="13283C"/>
           </a:solidFill>
           <a:ln w="15875">
             <a:solidFill>
@@ -5581,18 +5859,25 @@
             </a:solidFill>
             <a:prstDash val="solid"/>
           </a:ln>
-        </p:spPr>
-      </p:sp>
-      <p:sp>
-        <p:nvSpPr>
-          <p:cNvPr id="7" name="Shape 5"/>
-          <p:cNvSpPr/>
-          <p:nvPr/>
-        </p:nvSpPr>
-        <p:spPr>
-          <a:xfrm>
-            <a:off x="548640" y="1691640"/>
-            <a:ext cx="82296" cy="2743200"/>
+          <a:effectLst>
+            <a:outerShdw sx="100000" sy="100000" kx="0" ky="0" algn="bl" rotWithShape="0" blurRad="88900" dist="38100" dir="5400000">
+              <a:srgbClr val="000000">
+                <a:alpha val="50000"/>
+              </a:srgbClr>
+            </a:outerShdw>
+          </a:effectLst>
+        </p:spPr>
+      </p:sp>
+      <p:sp>
+        <p:nvSpPr>
+          <p:cNvPr id="8" name="Shape 6"/>
+          <p:cNvSpPr/>
+          <p:nvPr/>
+        </p:nvSpPr>
+        <p:spPr>
+          <a:xfrm>
+            <a:off x="562356" y="1764792"/>
+            <a:ext cx="73152" cy="2596896"/>
           </a:xfrm>
           <a:prstGeom prst="rect">
             <a:avLst/>
@@ -5605,14 +5890,14 @@
       </p:sp>
       <p:sp>
         <p:nvSpPr>
-          <p:cNvPr id="8" name="Text 6"/>
-          <p:cNvSpPr/>
-          <p:nvPr/>
-        </p:nvSpPr>
-        <p:spPr>
-          <a:xfrm>
-            <a:off x="786384" y="1837944"/>
-            <a:ext cx="3502152" cy="384048"/>
+          <p:cNvPr id="9" name="Text 7"/>
+          <p:cNvSpPr/>
+          <p:nvPr/>
+        </p:nvSpPr>
+        <p:spPr>
+          <a:xfrm>
+            <a:off x="804672" y="1828800"/>
+            <a:ext cx="3483864" cy="384048"/>
           </a:xfrm>
           <a:prstGeom prst="rect">
             <a:avLst/>
@@ -5628,7 +5913,7 @@
               <a:buNone/>
             </a:pPr>
             <a:r>
-              <a:rPr lang="en-US" sz="1500" b="1" dirty="0">
+              <a:rPr lang="en-US" sz="1500" b="1" spc="50" kern="0" dirty="0">
                 <a:solidFill>
                   <a:srgbClr val="34D399"/>
                 </a:solidFill>
@@ -5644,14 +5929,34 @@
       </p:sp>
       <p:sp>
         <p:nvSpPr>
-          <p:cNvPr id="9" name="Text 7"/>
-          <p:cNvSpPr/>
-          <p:nvPr/>
-        </p:nvSpPr>
-        <p:spPr>
-          <a:xfrm>
-            <a:off x="786384" y="2276856"/>
-            <a:ext cx="3429000" cy="2011680"/>
+          <p:cNvPr id="10" name="Shape 8"/>
+          <p:cNvSpPr/>
+          <p:nvPr/>
+        </p:nvSpPr>
+        <p:spPr>
+          <a:xfrm>
+            <a:off x="804672" y="2221992"/>
+            <a:ext cx="3374136" cy="16459"/>
+          </a:xfrm>
+          <a:prstGeom prst="rect">
+            <a:avLst/>
+          </a:prstGeom>
+          <a:solidFill>
+            <a:srgbClr val="264862"/>
+          </a:solidFill>
+          <a:ln/>
+        </p:spPr>
+      </p:sp>
+      <p:sp>
+        <p:nvSpPr>
+          <p:cNvPr id="11" name="Text 9"/>
+          <p:cNvSpPr/>
+          <p:nvPr/>
+        </p:nvSpPr>
+        <p:spPr>
+          <a:xfrm>
+            <a:off x="804672" y="2331720"/>
+            <a:ext cx="3410712" cy="1956816"/>
           </a:xfrm>
           <a:prstGeom prst="rect">
             <a:avLst/>
@@ -5673,7 +5978,7 @@
             <a:r>
               <a:rPr lang="en-US" sz="1250" dirty="0">
                 <a:solidFill>
-                  <a:srgbClr val="E8EEF5"/>
+                  <a:srgbClr val="EAF1F8"/>
                 </a:solidFill>
                 <a:latin typeface="Calibri" pitchFamily="34" charset="0"/>
                 <a:ea typeface="Calibri" pitchFamily="34" charset="-122"/>
@@ -5694,7 +5999,7 @@
             <a:r>
               <a:rPr lang="en-US" sz="1250" dirty="0">
                 <a:solidFill>
-                  <a:srgbClr val="E8EEF5"/>
+                  <a:srgbClr val="EAF1F8"/>
                 </a:solidFill>
                 <a:latin typeface="Calibri" pitchFamily="34" charset="0"/>
                 <a:ea typeface="Calibri" pitchFamily="34" charset="-122"/>
@@ -5715,7 +6020,7 @@
             <a:r>
               <a:rPr lang="en-US" sz="1250" dirty="0">
                 <a:solidFill>
-                  <a:srgbClr val="E8EEF5"/>
+                  <a:srgbClr val="EAF1F8"/>
                 </a:solidFill>
                 <a:latin typeface="Calibri" pitchFamily="34" charset="0"/>
                 <a:ea typeface="Calibri" pitchFamily="34" charset="-122"/>
@@ -5729,7 +6034,7 @@
       </p:sp>
       <p:sp>
         <p:nvSpPr>
-          <p:cNvPr id="10" name="Shape 8"/>
+          <p:cNvPr id="12" name="Shape 10"/>
           <p:cNvSpPr/>
           <p:nvPr/>
         </p:nvSpPr>
@@ -5738,11 +6043,13 @@
             <a:off x="4663440" y="1691640"/>
             <a:ext cx="3931920" cy="2743200"/>
           </a:xfrm>
-          <a:prstGeom prst="rect">
-            <a:avLst/>
+          <a:prstGeom prst="roundRect">
+            <a:avLst>
+              <a:gd name="adj" fmla="val 1667"/>
+            </a:avLst>
           </a:prstGeom>
           <a:solidFill>
-            <a:srgbClr val="12293D"/>
+            <a:srgbClr val="13283C"/>
           </a:solidFill>
           <a:ln w="15875">
             <a:solidFill>
@@ -5750,18 +6057,25 @@
             </a:solidFill>
             <a:prstDash val="solid"/>
           </a:ln>
-        </p:spPr>
-      </p:sp>
-      <p:sp>
-        <p:nvSpPr>
-          <p:cNvPr id="11" name="Shape 9"/>
-          <p:cNvSpPr/>
-          <p:nvPr/>
-        </p:nvSpPr>
-        <p:spPr>
-          <a:xfrm>
-            <a:off x="4663440" y="1691640"/>
-            <a:ext cx="82296" cy="2743200"/>
+          <a:effectLst>
+            <a:outerShdw sx="100000" sy="100000" kx="0" ky="0" algn="bl" rotWithShape="0" blurRad="88900" dist="38100" dir="5400000">
+              <a:srgbClr val="000000">
+                <a:alpha val="50000"/>
+              </a:srgbClr>
+            </a:outerShdw>
+          </a:effectLst>
+        </p:spPr>
+      </p:sp>
+      <p:sp>
+        <p:nvSpPr>
+          <p:cNvPr id="13" name="Shape 11"/>
+          <p:cNvSpPr/>
+          <p:nvPr/>
+        </p:nvSpPr>
+        <p:spPr>
+          <a:xfrm>
+            <a:off x="4677156" y="1764792"/>
+            <a:ext cx="73152" cy="2596896"/>
           </a:xfrm>
           <a:prstGeom prst="rect">
             <a:avLst/>
@@ -5774,14 +6088,14 @@
       </p:sp>
       <p:sp>
         <p:nvSpPr>
-          <p:cNvPr id="12" name="Text 10"/>
-          <p:cNvSpPr/>
-          <p:nvPr/>
-        </p:nvSpPr>
-        <p:spPr>
-          <a:xfrm>
-            <a:off x="4901184" y="1837944"/>
-            <a:ext cx="3547872" cy="384048"/>
+          <p:cNvPr id="14" name="Text 12"/>
+          <p:cNvSpPr/>
+          <p:nvPr/>
+        </p:nvSpPr>
+        <p:spPr>
+          <a:xfrm>
+            <a:off x="4919472" y="1828800"/>
+            <a:ext cx="3529584" cy="384048"/>
           </a:xfrm>
           <a:prstGeom prst="rect">
             <a:avLst/>
@@ -5797,7 +6111,7 @@
               <a:buNone/>
             </a:pPr>
             <a:r>
-              <a:rPr lang="en-US" sz="1500" b="1" dirty="0">
+              <a:rPr lang="en-US" sz="1500" b="1" spc="50" kern="0" dirty="0">
                 <a:solidFill>
                   <a:srgbClr val="22D3EE"/>
                 </a:solidFill>
@@ -5813,14 +6127,34 @@
       </p:sp>
       <p:sp>
         <p:nvSpPr>
-          <p:cNvPr id="13" name="Text 11"/>
-          <p:cNvSpPr/>
-          <p:nvPr/>
-        </p:nvSpPr>
-        <p:spPr>
-          <a:xfrm>
-            <a:off x="4901184" y="2276856"/>
-            <a:ext cx="3474720" cy="2011680"/>
+          <p:cNvPr id="15" name="Shape 13"/>
+          <p:cNvSpPr/>
+          <p:nvPr/>
+        </p:nvSpPr>
+        <p:spPr>
+          <a:xfrm>
+            <a:off x="4919472" y="2221992"/>
+            <a:ext cx="3419856" cy="16459"/>
+          </a:xfrm>
+          <a:prstGeom prst="rect">
+            <a:avLst/>
+          </a:prstGeom>
+          <a:solidFill>
+            <a:srgbClr val="264862"/>
+          </a:solidFill>
+          <a:ln/>
+        </p:spPr>
+      </p:sp>
+      <p:sp>
+        <p:nvSpPr>
+          <p:cNvPr id="16" name="Text 14"/>
+          <p:cNvSpPr/>
+          <p:nvPr/>
+        </p:nvSpPr>
+        <p:spPr>
+          <a:xfrm>
+            <a:off x="4919472" y="2331720"/>
+            <a:ext cx="3456432" cy="1956816"/>
           </a:xfrm>
           <a:prstGeom prst="rect">
             <a:avLst/>
@@ -5842,7 +6176,7 @@
             <a:r>
               <a:rPr lang="en-US" sz="1250" dirty="0">
                 <a:solidFill>
-                  <a:srgbClr val="E8EEF5"/>
+                  <a:srgbClr val="EAF1F8"/>
                 </a:solidFill>
                 <a:latin typeface="Calibri" pitchFamily="34" charset="0"/>
                 <a:ea typeface="Calibri" pitchFamily="34" charset="-122"/>
@@ -5863,7 +6197,7 @@
             <a:r>
               <a:rPr lang="en-US" sz="1250" dirty="0">
                 <a:solidFill>
-                  <a:srgbClr val="E8EEF5"/>
+                  <a:srgbClr val="EAF1F8"/>
                 </a:solidFill>
                 <a:latin typeface="Calibri" pitchFamily="34" charset="0"/>
                 <a:ea typeface="Calibri" pitchFamily="34" charset="-122"/>
@@ -5884,7 +6218,7 @@
             <a:r>
               <a:rPr lang="en-US" sz="1250" dirty="0">
                 <a:solidFill>
-                  <a:srgbClr val="E8EEF5"/>
+                  <a:srgbClr val="EAF1F8"/>
                 </a:solidFill>
                 <a:latin typeface="Calibri" pitchFamily="34" charset="0"/>
                 <a:ea typeface="Calibri" pitchFamily="34" charset="-122"/>
@@ -5910,7 +6244,7 @@
     <p:bg>
       <p:bgPr>
         <a:solidFill>
-          <a:srgbClr val="0B1B2B"/>
+          <a:srgbClr val="0A1622"/>
         </a:solidFill>
       </p:bgPr>
     </p:bg>
@@ -5948,6 +6282,13 @@
             <a:srgbClr val="22D3EE"/>
           </a:solidFill>
           <a:ln/>
+          <a:effectLst>
+            <a:outerShdw sx="100000" sy="100000" kx="0" ky="0" algn="bl" rotWithShape="0" blurRad="50800" dist="25400" dir="5400000">
+              <a:srgbClr val="000000">
+                <a:alpha val="40000"/>
+              </a:srgbClr>
+            </a:outerShdw>
+          </a:effectLst>
         </p:spPr>
       </p:sp>
       <p:sp>
@@ -5977,7 +6318,7 @@
             <a:r>
               <a:rPr lang="en-US" sz="2200" b="1" dirty="0">
                 <a:solidFill>
-                  <a:srgbClr val="0B1B2B"/>
+                  <a:srgbClr val="0A1622"/>
                 </a:solidFill>
                 <a:latin typeface="Consolas" pitchFamily="34" charset="0"/>
                 <a:ea typeface="Consolas" pitchFamily="34" charset="-122"/>
@@ -6075,16 +6416,36 @@
         </p:nvSpPr>
         <p:spPr>
           <a:xfrm>
+            <a:off x="1298448" y="1316736"/>
+            <a:ext cx="1005840" cy="32004"/>
+          </a:xfrm>
+          <a:prstGeom prst="rect">
+            <a:avLst/>
+          </a:prstGeom>
+          <a:solidFill>
+            <a:srgbClr val="22D3EE"/>
+          </a:solidFill>
+          <a:ln/>
+        </p:spPr>
+      </p:sp>
+      <p:sp>
+        <p:nvSpPr>
+          <p:cNvPr id="7" name="Shape 5"/>
+          <p:cNvSpPr/>
+          <p:nvPr/>
+        </p:nvSpPr>
+        <p:spPr>
+          <a:xfrm>
             <a:off x="548640" y="2011680"/>
-            <a:ext cx="2615184" cy="777240"/>
+            <a:ext cx="2602992" cy="822960"/>
           </a:xfrm>
           <a:prstGeom prst="roundRect">
             <a:avLst>
-              <a:gd name="adj" fmla="val 8235"/>
+              <a:gd name="adj" fmla="val 8889"/>
             </a:avLst>
           </a:prstGeom>
           <a:solidFill>
-            <a:srgbClr val="12293D"/>
+            <a:srgbClr val="13283C"/>
           </a:solidFill>
           <a:ln w="15875">
             <a:solidFill>
@@ -6092,18 +6453,45 @@
             </a:solidFill>
             <a:prstDash val="solid"/>
           </a:ln>
-        </p:spPr>
-      </p:sp>
-      <p:sp>
-        <p:nvSpPr>
-          <p:cNvPr id="7" name="Text 5"/>
-          <p:cNvSpPr/>
-          <p:nvPr/>
-        </p:nvSpPr>
-        <p:spPr>
-          <a:xfrm>
-            <a:off x="585216" y="2011680"/>
-            <a:ext cx="2542032" cy="777240"/>
+          <a:effectLst>
+            <a:outerShdw sx="100000" sy="100000" kx="0" ky="0" algn="bl" rotWithShape="0" blurRad="50800" dist="25400" dir="5400000">
+              <a:srgbClr val="000000">
+                <a:alpha val="40000"/>
+              </a:srgbClr>
+            </a:outerShdw>
+          </a:effectLst>
+        </p:spPr>
+      </p:sp>
+      <p:sp>
+        <p:nvSpPr>
+          <p:cNvPr id="8" name="Shape 6"/>
+          <p:cNvSpPr/>
+          <p:nvPr/>
+        </p:nvSpPr>
+        <p:spPr>
+          <a:xfrm>
+            <a:off x="658368" y="2157984"/>
+            <a:ext cx="2383536" cy="27432"/>
+          </a:xfrm>
+          <a:prstGeom prst="rect">
+            <a:avLst/>
+          </a:prstGeom>
+          <a:solidFill>
+            <a:srgbClr val="34D399"/>
+          </a:solidFill>
+          <a:ln/>
+        </p:spPr>
+      </p:sp>
+      <p:sp>
+        <p:nvSpPr>
+          <p:cNvPr id="9" name="Text 7"/>
+          <p:cNvSpPr/>
+          <p:nvPr/>
+        </p:nvSpPr>
+        <p:spPr>
+          <a:xfrm>
+            <a:off x="585216" y="2121408"/>
+            <a:ext cx="2529840" cy="713232"/>
           </a:xfrm>
           <a:prstGeom prst="rect">
             <a:avLst/>
@@ -6121,7 +6509,7 @@
             <a:r>
               <a:rPr lang="en-US" sz="1150" b="1" dirty="0">
                 <a:solidFill>
-                  <a:srgbClr val="E8EEF5"/>
+                  <a:srgbClr val="EAF1F8"/>
                 </a:solidFill>
                 <a:latin typeface="Calibri" pitchFamily="34" charset="0"/>
                 <a:ea typeface="Calibri" pitchFamily="34" charset="-122"/>
@@ -6135,22 +6523,61 @@
       </p:sp>
       <p:sp>
         <p:nvSpPr>
-          <p:cNvPr id="8" name="Shape 6"/>
-          <p:cNvSpPr/>
-          <p:nvPr/>
-        </p:nvSpPr>
-        <p:spPr>
-          <a:xfrm>
-            <a:off x="3310128" y="2011680"/>
-            <a:ext cx="2615184" cy="777240"/>
+          <p:cNvPr id="10" name="Text 8"/>
+          <p:cNvSpPr/>
+          <p:nvPr/>
+        </p:nvSpPr>
+        <p:spPr>
+          <a:xfrm>
+            <a:off x="3115056" y="2011680"/>
+            <a:ext cx="237744" cy="822960"/>
+          </a:xfrm>
+          <a:prstGeom prst="rect">
+            <a:avLst/>
+          </a:prstGeom>
+          <a:noFill/>
+          <a:ln/>
+        </p:spPr>
+        <p:txBody>
+          <a:bodyPr wrap="square" lIns="0" tIns="0" rIns="0" bIns="0" rtlCol="0" anchor="ctr"/>
+          <a:lstStyle/>
+          <a:p>
+            <a:pPr algn="ctr" indent="0" marL="0">
+              <a:buNone/>
+            </a:pPr>
+            <a:r>
+              <a:rPr lang="en-US" sz="1800" b="1" dirty="0">
+                <a:solidFill>
+                  <a:srgbClr val="34D399"/>
+                </a:solidFill>
+                <a:latin typeface="Trebuchet MS" pitchFamily="34" charset="0"/>
+                <a:ea typeface="Trebuchet MS" pitchFamily="34" charset="-122"/>
+                <a:cs typeface="Trebuchet MS" pitchFamily="34" charset="-120"/>
+              </a:rPr>
+              <a:t>›</a:t>
+            </a:r>
+            <a:endParaRPr lang="en-US" sz="1800" dirty="0"/>
+          </a:p>
+        </p:txBody>
+      </p:sp>
+      <p:sp>
+        <p:nvSpPr>
+          <p:cNvPr id="11" name="Shape 9"/>
+          <p:cNvSpPr/>
+          <p:nvPr/>
+        </p:nvSpPr>
+        <p:spPr>
+          <a:xfrm>
+            <a:off x="3316224" y="2011680"/>
+            <a:ext cx="2602992" cy="822960"/>
           </a:xfrm>
           <a:prstGeom prst="roundRect">
             <a:avLst>
-              <a:gd name="adj" fmla="val 8235"/>
+              <a:gd name="adj" fmla="val 8889"/>
             </a:avLst>
           </a:prstGeom>
           <a:solidFill>
-            <a:srgbClr val="12293D"/>
+            <a:srgbClr val="13283C"/>
           </a:solidFill>
           <a:ln w="15875">
             <a:solidFill>
@@ -6158,18 +6585,45 @@
             </a:solidFill>
             <a:prstDash val="solid"/>
           </a:ln>
-        </p:spPr>
-      </p:sp>
-      <p:sp>
-        <p:nvSpPr>
-          <p:cNvPr id="9" name="Text 7"/>
-          <p:cNvSpPr/>
-          <p:nvPr/>
-        </p:nvSpPr>
-        <p:spPr>
-          <a:xfrm>
-            <a:off x="3346704" y="2011680"/>
-            <a:ext cx="2542032" cy="777240"/>
+          <a:effectLst>
+            <a:outerShdw sx="100000" sy="100000" kx="0" ky="0" algn="bl" rotWithShape="0" blurRad="50800" dist="25400" dir="5400000">
+              <a:srgbClr val="000000">
+                <a:alpha val="40000"/>
+              </a:srgbClr>
+            </a:outerShdw>
+          </a:effectLst>
+        </p:spPr>
+      </p:sp>
+      <p:sp>
+        <p:nvSpPr>
+          <p:cNvPr id="12" name="Shape 10"/>
+          <p:cNvSpPr/>
+          <p:nvPr/>
+        </p:nvSpPr>
+        <p:spPr>
+          <a:xfrm>
+            <a:off x="3425952" y="2157984"/>
+            <a:ext cx="2383536" cy="27432"/>
+          </a:xfrm>
+          <a:prstGeom prst="rect">
+            <a:avLst/>
+          </a:prstGeom>
+          <a:solidFill>
+            <a:srgbClr val="34D399"/>
+          </a:solidFill>
+          <a:ln/>
+        </p:spPr>
+      </p:sp>
+      <p:sp>
+        <p:nvSpPr>
+          <p:cNvPr id="13" name="Text 11"/>
+          <p:cNvSpPr/>
+          <p:nvPr/>
+        </p:nvSpPr>
+        <p:spPr>
+          <a:xfrm>
+            <a:off x="3352800" y="2121408"/>
+            <a:ext cx="2529840" cy="713232"/>
           </a:xfrm>
           <a:prstGeom prst="rect">
             <a:avLst/>
@@ -6187,7 +6641,7 @@
             <a:r>
               <a:rPr lang="en-US" sz="1150" b="1" dirty="0">
                 <a:solidFill>
-                  <a:srgbClr val="E8EEF5"/>
+                  <a:srgbClr val="EAF1F8"/>
                 </a:solidFill>
                 <a:latin typeface="Calibri" pitchFamily="34" charset="0"/>
                 <a:ea typeface="Calibri" pitchFamily="34" charset="-122"/>
@@ -6204,7 +6658,7 @@
             <a:r>
               <a:rPr lang="en-US" sz="1150" b="1" dirty="0">
                 <a:solidFill>
-                  <a:srgbClr val="E8EEF5"/>
+                  <a:srgbClr val="EAF1F8"/>
                 </a:solidFill>
                 <a:latin typeface="Calibri" pitchFamily="34" charset="0"/>
                 <a:ea typeface="Calibri" pitchFamily="34" charset="-122"/>
@@ -6218,22 +6672,61 @@
       </p:sp>
       <p:sp>
         <p:nvSpPr>
-          <p:cNvPr id="10" name="Shape 8"/>
-          <p:cNvSpPr/>
-          <p:nvPr/>
-        </p:nvSpPr>
-        <p:spPr>
-          <a:xfrm>
-            <a:off x="6071616" y="2011680"/>
-            <a:ext cx="2615184" cy="777240"/>
+          <p:cNvPr id="14" name="Text 12"/>
+          <p:cNvSpPr/>
+          <p:nvPr/>
+        </p:nvSpPr>
+        <p:spPr>
+          <a:xfrm>
+            <a:off x="5882640" y="2011680"/>
+            <a:ext cx="237744" cy="822960"/>
+          </a:xfrm>
+          <a:prstGeom prst="rect">
+            <a:avLst/>
+          </a:prstGeom>
+          <a:noFill/>
+          <a:ln/>
+        </p:spPr>
+        <p:txBody>
+          <a:bodyPr wrap="square" lIns="0" tIns="0" rIns="0" bIns="0" rtlCol="0" anchor="ctr"/>
+          <a:lstStyle/>
+          <a:p>
+            <a:pPr algn="ctr" indent="0" marL="0">
+              <a:buNone/>
+            </a:pPr>
+            <a:r>
+              <a:rPr lang="en-US" sz="1800" b="1" dirty="0">
+                <a:solidFill>
+                  <a:srgbClr val="34D399"/>
+                </a:solidFill>
+                <a:latin typeface="Trebuchet MS" pitchFamily="34" charset="0"/>
+                <a:ea typeface="Trebuchet MS" pitchFamily="34" charset="-122"/>
+                <a:cs typeface="Trebuchet MS" pitchFamily="34" charset="-120"/>
+              </a:rPr>
+              <a:t>›</a:t>
+            </a:r>
+            <a:endParaRPr lang="en-US" sz="1800" dirty="0"/>
+          </a:p>
+        </p:txBody>
+      </p:sp>
+      <p:sp>
+        <p:nvSpPr>
+          <p:cNvPr id="15" name="Shape 13"/>
+          <p:cNvSpPr/>
+          <p:nvPr/>
+        </p:nvSpPr>
+        <p:spPr>
+          <a:xfrm>
+            <a:off x="6083808" y="2011680"/>
+            <a:ext cx="2602992" cy="822960"/>
           </a:xfrm>
           <a:prstGeom prst="roundRect">
             <a:avLst>
-              <a:gd name="adj" fmla="val 8235"/>
+              <a:gd name="adj" fmla="val 8889"/>
             </a:avLst>
           </a:prstGeom>
           <a:solidFill>
-            <a:srgbClr val="12293D"/>
+            <a:srgbClr val="13283C"/>
           </a:solidFill>
           <a:ln w="15875">
             <a:solidFill>
@@ -6241,18 +6734,45 @@
             </a:solidFill>
             <a:prstDash val="solid"/>
           </a:ln>
-        </p:spPr>
-      </p:sp>
-      <p:sp>
-        <p:nvSpPr>
-          <p:cNvPr id="11" name="Text 9"/>
-          <p:cNvSpPr/>
-          <p:nvPr/>
-        </p:nvSpPr>
-        <p:spPr>
-          <a:xfrm>
-            <a:off x="6108192" y="2011680"/>
-            <a:ext cx="2542032" cy="777240"/>
+          <a:effectLst>
+            <a:outerShdw sx="100000" sy="100000" kx="0" ky="0" algn="bl" rotWithShape="0" blurRad="50800" dist="25400" dir="5400000">
+              <a:srgbClr val="000000">
+                <a:alpha val="40000"/>
+              </a:srgbClr>
+            </a:outerShdw>
+          </a:effectLst>
+        </p:spPr>
+      </p:sp>
+      <p:sp>
+        <p:nvSpPr>
+          <p:cNvPr id="16" name="Shape 14"/>
+          <p:cNvSpPr/>
+          <p:nvPr/>
+        </p:nvSpPr>
+        <p:spPr>
+          <a:xfrm>
+            <a:off x="6193536" y="2157984"/>
+            <a:ext cx="2383536" cy="27432"/>
+          </a:xfrm>
+          <a:prstGeom prst="rect">
+            <a:avLst/>
+          </a:prstGeom>
+          <a:solidFill>
+            <a:srgbClr val="34D399"/>
+          </a:solidFill>
+          <a:ln/>
+        </p:spPr>
+      </p:sp>
+      <p:sp>
+        <p:nvSpPr>
+          <p:cNvPr id="17" name="Text 15"/>
+          <p:cNvSpPr/>
+          <p:nvPr/>
+        </p:nvSpPr>
+        <p:spPr>
+          <a:xfrm>
+            <a:off x="6120384" y="2121408"/>
+            <a:ext cx="2529840" cy="713232"/>
           </a:xfrm>
           <a:prstGeom prst="rect">
             <a:avLst/>
@@ -6270,7 +6790,7 @@
             <a:r>
               <a:rPr lang="en-US" sz="1150" b="1" dirty="0">
                 <a:solidFill>
-                  <a:srgbClr val="E8EEF5"/>
+                  <a:srgbClr val="EAF1F8"/>
                 </a:solidFill>
                 <a:latin typeface="Calibri" pitchFamily="34" charset="0"/>
                 <a:ea typeface="Calibri" pitchFamily="34" charset="-122"/>
@@ -6287,7 +6807,7 @@
             <a:r>
               <a:rPr lang="en-US" sz="1150" b="1" dirty="0">
                 <a:solidFill>
-                  <a:srgbClr val="E8EEF5"/>
+                  <a:srgbClr val="EAF1F8"/>
                 </a:solidFill>
                 <a:latin typeface="Calibri" pitchFamily="34" charset="0"/>
                 <a:ea typeface="Calibri" pitchFamily="34" charset="-122"/>
@@ -6301,7 +6821,7 @@
       </p:sp>
       <p:sp>
         <p:nvSpPr>
-          <p:cNvPr id="12" name="Text 10"/>
+          <p:cNvPr id="18" name="Text 16"/>
           <p:cNvSpPr/>
           <p:nvPr/>
         </p:nvSpPr>
@@ -6330,7 +6850,7 @@
             <a:r>
               <a:rPr lang="en-US" sz="1500" dirty="0">
                 <a:solidFill>
-                  <a:srgbClr val="E8EEF5"/>
+                  <a:srgbClr val="EAF1F8"/>
                 </a:solidFill>
                 <a:latin typeface="Calibri" pitchFamily="34" charset="0"/>
                 <a:ea typeface="Calibri" pitchFamily="34" charset="-122"/>
@@ -6351,7 +6871,7 @@
             <a:r>
               <a:rPr lang="en-US" sz="1500" dirty="0">
                 <a:solidFill>
-                  <a:srgbClr val="E8EEF5"/>
+                  <a:srgbClr val="EAF1F8"/>
                 </a:solidFill>
                 <a:latin typeface="Calibri" pitchFamily="34" charset="0"/>
                 <a:ea typeface="Calibri" pitchFamily="34" charset="-122"/>
@@ -6398,7 +6918,7 @@
     <p:bg>
       <p:bgPr>
         <a:solidFill>
-          <a:srgbClr val="0B1B2B"/>
+          <a:srgbClr val="0A1622"/>
         </a:solidFill>
       </p:bgPr>
     </p:bg>
@@ -6436,6 +6956,13 @@
             <a:srgbClr val="22D3EE"/>
           </a:solidFill>
           <a:ln/>
+          <a:effectLst>
+            <a:outerShdw sx="100000" sy="100000" kx="0" ky="0" algn="bl" rotWithShape="0" blurRad="50800" dist="25400" dir="5400000">
+              <a:srgbClr val="000000">
+                <a:alpha val="40000"/>
+              </a:srgbClr>
+            </a:outerShdw>
+          </a:effectLst>
         </p:spPr>
       </p:sp>
       <p:sp>
@@ -6465,7 +6992,7 @@
             <a:r>
               <a:rPr lang="en-US" sz="2200" b="1" dirty="0">
                 <a:solidFill>
-                  <a:srgbClr val="0B1B2B"/>
+                  <a:srgbClr val="0A1622"/>
                 </a:solidFill>
                 <a:latin typeface="Consolas" pitchFamily="34" charset="0"/>
                 <a:ea typeface="Consolas" pitchFamily="34" charset="-122"/>
@@ -6563,14 +7090,36 @@
         </p:nvSpPr>
         <p:spPr>
           <a:xfrm>
+            <a:off x="1298448" y="1316736"/>
+            <a:ext cx="1005840" cy="32004"/>
+          </a:xfrm>
+          <a:prstGeom prst="rect">
+            <a:avLst/>
+          </a:prstGeom>
+          <a:solidFill>
+            <a:srgbClr val="22D3EE"/>
+          </a:solidFill>
+          <a:ln/>
+        </p:spPr>
+      </p:sp>
+      <p:sp>
+        <p:nvSpPr>
+          <p:cNvPr id="7" name="Shape 5"/>
+          <p:cNvSpPr/>
+          <p:nvPr/>
+        </p:nvSpPr>
+        <p:spPr>
+          <a:xfrm>
             <a:off x="548640" y="1691640"/>
             <a:ext cx="2542032" cy="2743200"/>
           </a:xfrm>
-          <a:prstGeom prst="rect">
-            <a:avLst/>
+          <a:prstGeom prst="roundRect">
+            <a:avLst>
+              <a:gd name="adj" fmla="val 1799"/>
+            </a:avLst>
           </a:prstGeom>
           <a:solidFill>
-            <a:srgbClr val="12293D"/>
+            <a:srgbClr val="13283C"/>
           </a:solidFill>
           <a:ln w="15875">
             <a:solidFill>
@@ -6578,18 +7127,25 @@
             </a:solidFill>
             <a:prstDash val="solid"/>
           </a:ln>
-        </p:spPr>
-      </p:sp>
-      <p:sp>
-        <p:nvSpPr>
-          <p:cNvPr id="7" name="Shape 5"/>
-          <p:cNvSpPr/>
-          <p:nvPr/>
-        </p:nvSpPr>
-        <p:spPr>
-          <a:xfrm>
-            <a:off x="548640" y="1691640"/>
-            <a:ext cx="82296" cy="2743200"/>
+          <a:effectLst>
+            <a:outerShdw sx="100000" sy="100000" kx="0" ky="0" algn="bl" rotWithShape="0" blurRad="88900" dist="38100" dir="5400000">
+              <a:srgbClr val="000000">
+                <a:alpha val="50000"/>
+              </a:srgbClr>
+            </a:outerShdw>
+          </a:effectLst>
+        </p:spPr>
+      </p:sp>
+      <p:sp>
+        <p:nvSpPr>
+          <p:cNvPr id="8" name="Shape 6"/>
+          <p:cNvSpPr/>
+          <p:nvPr/>
+        </p:nvSpPr>
+        <p:spPr>
+          <a:xfrm>
+            <a:off x="562356" y="1764792"/>
+            <a:ext cx="73152" cy="2596896"/>
           </a:xfrm>
           <a:prstGeom prst="rect">
             <a:avLst/>
@@ -6602,14 +7158,14 @@
       </p:sp>
       <p:sp>
         <p:nvSpPr>
-          <p:cNvPr id="8" name="Text 6"/>
-          <p:cNvSpPr/>
-          <p:nvPr/>
-        </p:nvSpPr>
-        <p:spPr>
-          <a:xfrm>
-            <a:off x="786384" y="1837944"/>
-            <a:ext cx="2157984" cy="384048"/>
+          <p:cNvPr id="9" name="Text 7"/>
+          <p:cNvSpPr/>
+          <p:nvPr/>
+        </p:nvSpPr>
+        <p:spPr>
+          <a:xfrm>
+            <a:off x="804672" y="1828800"/>
+            <a:ext cx="2139696" cy="384048"/>
           </a:xfrm>
           <a:prstGeom prst="rect">
             <a:avLst/>
@@ -6625,7 +7181,7 @@
               <a:buNone/>
             </a:pPr>
             <a:r>
-              <a:rPr lang="en-US" sz="1500" b="1" dirty="0">
+              <a:rPr lang="en-US" sz="1500" b="1" spc="50" kern="0" dirty="0">
                 <a:solidFill>
                   <a:srgbClr val="34D399"/>
                 </a:solidFill>
@@ -6641,14 +7197,34 @@
       </p:sp>
       <p:sp>
         <p:nvSpPr>
-          <p:cNvPr id="9" name="Text 7"/>
-          <p:cNvSpPr/>
-          <p:nvPr/>
-        </p:nvSpPr>
-        <p:spPr>
-          <a:xfrm>
-            <a:off x="786384" y="2276856"/>
-            <a:ext cx="2084832" cy="2011680"/>
+          <p:cNvPr id="10" name="Shape 8"/>
+          <p:cNvSpPr/>
+          <p:nvPr/>
+        </p:nvSpPr>
+        <p:spPr>
+          <a:xfrm>
+            <a:off x="804672" y="2221992"/>
+            <a:ext cx="2029968" cy="16459"/>
+          </a:xfrm>
+          <a:prstGeom prst="rect">
+            <a:avLst/>
+          </a:prstGeom>
+          <a:solidFill>
+            <a:srgbClr val="264862"/>
+          </a:solidFill>
+          <a:ln/>
+        </p:spPr>
+      </p:sp>
+      <p:sp>
+        <p:nvSpPr>
+          <p:cNvPr id="11" name="Text 9"/>
+          <p:cNvSpPr/>
+          <p:nvPr/>
+        </p:nvSpPr>
+        <p:spPr>
+          <a:xfrm>
+            <a:off x="804672" y="2331720"/>
+            <a:ext cx="2066544" cy="1956816"/>
           </a:xfrm>
           <a:prstGeom prst="rect">
             <a:avLst/>
@@ -6670,7 +7246,7 @@
             <a:r>
               <a:rPr lang="en-US" sz="1200" dirty="0">
                 <a:solidFill>
-                  <a:srgbClr val="E8EEF5"/>
+                  <a:srgbClr val="EAF1F8"/>
                 </a:solidFill>
                 <a:latin typeface="Calibri" pitchFamily="34" charset="0"/>
                 <a:ea typeface="Calibri" pitchFamily="34" charset="-122"/>
@@ -6691,7 +7267,7 @@
             <a:r>
               <a:rPr lang="en-US" sz="1200" dirty="0">
                 <a:solidFill>
-                  <a:srgbClr val="E8EEF5"/>
+                  <a:srgbClr val="EAF1F8"/>
                 </a:solidFill>
                 <a:latin typeface="Calibri" pitchFamily="34" charset="0"/>
                 <a:ea typeface="Calibri" pitchFamily="34" charset="-122"/>
@@ -6712,7 +7288,7 @@
             <a:r>
               <a:rPr lang="en-US" sz="1200" dirty="0">
                 <a:solidFill>
-                  <a:srgbClr val="E8EEF5"/>
+                  <a:srgbClr val="EAF1F8"/>
                 </a:solidFill>
                 <a:latin typeface="Calibri" pitchFamily="34" charset="0"/>
                 <a:ea typeface="Calibri" pitchFamily="34" charset="-122"/>
@@ -6726,7 +7302,7 @@
       </p:sp>
       <p:sp>
         <p:nvSpPr>
-          <p:cNvPr id="10" name="Shape 8"/>
+          <p:cNvPr id="12" name="Shape 10"/>
           <p:cNvSpPr/>
           <p:nvPr/>
         </p:nvSpPr>
@@ -6735,50 +7311,59 @@
             <a:off x="3200400" y="1691640"/>
             <a:ext cx="2542032" cy="2743200"/>
           </a:xfrm>
-          <a:prstGeom prst="rect">
-            <a:avLst/>
+          <a:prstGeom prst="roundRect">
+            <a:avLst>
+              <a:gd name="adj" fmla="val 1799"/>
+            </a:avLst>
           </a:prstGeom>
           <a:solidFill>
-            <a:srgbClr val="12293D"/>
+            <a:srgbClr val="13283C"/>
           </a:solidFill>
           <a:ln w="15875">
             <a:solidFill>
-              <a:srgbClr val="A8B4C4"/>
+              <a:srgbClr val="9FB0C2"/>
             </a:solidFill>
             <a:prstDash val="solid"/>
           </a:ln>
-        </p:spPr>
-      </p:sp>
-      <p:sp>
-        <p:nvSpPr>
-          <p:cNvPr id="11" name="Shape 9"/>
-          <p:cNvSpPr/>
-          <p:nvPr/>
-        </p:nvSpPr>
-        <p:spPr>
-          <a:xfrm>
-            <a:off x="3200400" y="1691640"/>
-            <a:ext cx="82296" cy="2743200"/>
+          <a:effectLst>
+            <a:outerShdw sx="100000" sy="100000" kx="0" ky="0" algn="bl" rotWithShape="0" blurRad="88900" dist="38100" dir="5400000">
+              <a:srgbClr val="000000">
+                <a:alpha val="50000"/>
+              </a:srgbClr>
+            </a:outerShdw>
+          </a:effectLst>
+        </p:spPr>
+      </p:sp>
+      <p:sp>
+        <p:nvSpPr>
+          <p:cNvPr id="13" name="Shape 11"/>
+          <p:cNvSpPr/>
+          <p:nvPr/>
+        </p:nvSpPr>
+        <p:spPr>
+          <a:xfrm>
+            <a:off x="3214116" y="1764792"/>
+            <a:ext cx="73152" cy="2596896"/>
           </a:xfrm>
           <a:prstGeom prst="rect">
             <a:avLst/>
           </a:prstGeom>
           <a:solidFill>
-            <a:srgbClr val="A8B4C4"/>
+            <a:srgbClr val="9FB0C2"/>
           </a:solidFill>
           <a:ln/>
         </p:spPr>
       </p:sp>
       <p:sp>
         <p:nvSpPr>
-          <p:cNvPr id="12" name="Text 10"/>
-          <p:cNvSpPr/>
-          <p:nvPr/>
-        </p:nvSpPr>
-        <p:spPr>
-          <a:xfrm>
-            <a:off x="3438144" y="1837944"/>
-            <a:ext cx="2157984" cy="384048"/>
+          <p:cNvPr id="14" name="Text 12"/>
+          <p:cNvSpPr/>
+          <p:nvPr/>
+        </p:nvSpPr>
+        <p:spPr>
+          <a:xfrm>
+            <a:off x="3456432" y="1828800"/>
+            <a:ext cx="2139696" cy="384048"/>
           </a:xfrm>
           <a:prstGeom prst="rect">
             <a:avLst/>
@@ -6794,9 +7379,9 @@
               <a:buNone/>
             </a:pPr>
             <a:r>
-              <a:rPr lang="en-US" sz="1500" b="1" dirty="0">
-                <a:solidFill>
-                  <a:srgbClr val="A8B4C4"/>
+              <a:rPr lang="en-US" sz="1500" b="1" spc="50" kern="0" dirty="0">
+                <a:solidFill>
+                  <a:srgbClr val="9FB0C2"/>
                 </a:solidFill>
                 <a:latin typeface="Trebuchet MS" pitchFamily="34" charset="0"/>
                 <a:ea typeface="Trebuchet MS" pitchFamily="34" charset="-122"/>
@@ -6810,14 +7395,34 @@
       </p:sp>
       <p:sp>
         <p:nvSpPr>
-          <p:cNvPr id="13" name="Text 11"/>
-          <p:cNvSpPr/>
-          <p:nvPr/>
-        </p:nvSpPr>
-        <p:spPr>
-          <a:xfrm>
-            <a:off x="3438144" y="2276856"/>
-            <a:ext cx="2084832" cy="2011680"/>
+          <p:cNvPr id="15" name="Shape 13"/>
+          <p:cNvSpPr/>
+          <p:nvPr/>
+        </p:nvSpPr>
+        <p:spPr>
+          <a:xfrm>
+            <a:off x="3456432" y="2221992"/>
+            <a:ext cx="2029968" cy="16459"/>
+          </a:xfrm>
+          <a:prstGeom prst="rect">
+            <a:avLst/>
+          </a:prstGeom>
+          <a:solidFill>
+            <a:srgbClr val="264862"/>
+          </a:solidFill>
+          <a:ln/>
+        </p:spPr>
+      </p:sp>
+      <p:sp>
+        <p:nvSpPr>
+          <p:cNvPr id="16" name="Text 14"/>
+          <p:cNvSpPr/>
+          <p:nvPr/>
+        </p:nvSpPr>
+        <p:spPr>
+          <a:xfrm>
+            <a:off x="3456432" y="2331720"/>
+            <a:ext cx="2066544" cy="1956816"/>
           </a:xfrm>
           <a:prstGeom prst="rect">
             <a:avLst/>
@@ -6839,7 +7444,7 @@
             <a:r>
               <a:rPr lang="en-US" sz="1200" dirty="0">
                 <a:solidFill>
-                  <a:srgbClr val="E8EEF5"/>
+                  <a:srgbClr val="EAF1F8"/>
                 </a:solidFill>
                 <a:latin typeface="Calibri" pitchFamily="34" charset="0"/>
                 <a:ea typeface="Calibri" pitchFamily="34" charset="-122"/>
@@ -6860,7 +7465,7 @@
             <a:r>
               <a:rPr lang="en-US" sz="1200" dirty="0">
                 <a:solidFill>
-                  <a:srgbClr val="E8EEF5"/>
+                  <a:srgbClr val="EAF1F8"/>
                 </a:solidFill>
                 <a:latin typeface="Calibri" pitchFamily="34" charset="0"/>
                 <a:ea typeface="Calibri" pitchFamily="34" charset="-122"/>
@@ -6881,7 +7486,7 @@
             <a:r>
               <a:rPr lang="en-US" sz="1200" dirty="0">
                 <a:solidFill>
-                  <a:srgbClr val="E8EEF5"/>
+                  <a:srgbClr val="EAF1F8"/>
                 </a:solidFill>
                 <a:latin typeface="Calibri" pitchFamily="34" charset="0"/>
                 <a:ea typeface="Calibri" pitchFamily="34" charset="-122"/>
@@ -6895,7 +7500,7 @@
       </p:sp>
       <p:sp>
         <p:nvSpPr>
-          <p:cNvPr id="14" name="Shape 12"/>
+          <p:cNvPr id="17" name="Shape 15"/>
           <p:cNvSpPr/>
           <p:nvPr/>
         </p:nvSpPr>
@@ -6904,11 +7509,13 @@
             <a:off x="5669280" y="1691640"/>
             <a:ext cx="2542032" cy="2743200"/>
           </a:xfrm>
-          <a:prstGeom prst="rect">
-            <a:avLst/>
+          <a:prstGeom prst="roundRect">
+            <a:avLst>
+              <a:gd name="adj" fmla="val 1799"/>
+            </a:avLst>
           </a:prstGeom>
           <a:solidFill>
-            <a:srgbClr val="12293D"/>
+            <a:srgbClr val="13283C"/>
           </a:solidFill>
           <a:ln w="15875">
             <a:solidFill>
@@ -6916,18 +7523,25 @@
             </a:solidFill>
             <a:prstDash val="solid"/>
           </a:ln>
-        </p:spPr>
-      </p:sp>
-      <p:sp>
-        <p:nvSpPr>
-          <p:cNvPr id="15" name="Shape 13"/>
-          <p:cNvSpPr/>
-          <p:nvPr/>
-        </p:nvSpPr>
-        <p:spPr>
-          <a:xfrm>
-            <a:off x="5669280" y="1691640"/>
-            <a:ext cx="82296" cy="2743200"/>
+          <a:effectLst>
+            <a:outerShdw sx="100000" sy="100000" kx="0" ky="0" algn="bl" rotWithShape="0" blurRad="88900" dist="38100" dir="5400000">
+              <a:srgbClr val="000000">
+                <a:alpha val="50000"/>
+              </a:srgbClr>
+            </a:outerShdw>
+          </a:effectLst>
+        </p:spPr>
+      </p:sp>
+      <p:sp>
+        <p:nvSpPr>
+          <p:cNvPr id="18" name="Shape 16"/>
+          <p:cNvSpPr/>
+          <p:nvPr/>
+        </p:nvSpPr>
+        <p:spPr>
+          <a:xfrm>
+            <a:off x="5682996" y="1764792"/>
+            <a:ext cx="73152" cy="2596896"/>
           </a:xfrm>
           <a:prstGeom prst="rect">
             <a:avLst/>
@@ -6940,14 +7554,14 @@
       </p:sp>
       <p:sp>
         <p:nvSpPr>
-          <p:cNvPr id="16" name="Text 14"/>
-          <p:cNvSpPr/>
-          <p:nvPr/>
-        </p:nvSpPr>
-        <p:spPr>
-          <a:xfrm>
-            <a:off x="5907024" y="1837944"/>
-            <a:ext cx="2157984" cy="384048"/>
+          <p:cNvPr id="19" name="Text 17"/>
+          <p:cNvSpPr/>
+          <p:nvPr/>
+        </p:nvSpPr>
+        <p:spPr>
+          <a:xfrm>
+            <a:off x="5925312" y="1828800"/>
+            <a:ext cx="2139696" cy="384048"/>
           </a:xfrm>
           <a:prstGeom prst="rect">
             <a:avLst/>
@@ -6963,7 +7577,7 @@
               <a:buNone/>
             </a:pPr>
             <a:r>
-              <a:rPr lang="en-US" sz="1500" b="1" dirty="0">
+              <a:rPr lang="en-US" sz="1500" b="1" spc="50" kern="0" dirty="0">
                 <a:solidFill>
                   <a:srgbClr val="FB7185"/>
                 </a:solidFill>
@@ -6979,14 +7593,34 @@
       </p:sp>
       <p:sp>
         <p:nvSpPr>
-          <p:cNvPr id="17" name="Text 15"/>
-          <p:cNvSpPr/>
-          <p:nvPr/>
-        </p:nvSpPr>
-        <p:spPr>
-          <a:xfrm>
-            <a:off x="5907024" y="2276856"/>
-            <a:ext cx="2084832" cy="2011680"/>
+          <p:cNvPr id="20" name="Shape 18"/>
+          <p:cNvSpPr/>
+          <p:nvPr/>
+        </p:nvSpPr>
+        <p:spPr>
+          <a:xfrm>
+            <a:off x="5925312" y="2221992"/>
+            <a:ext cx="2029968" cy="16459"/>
+          </a:xfrm>
+          <a:prstGeom prst="rect">
+            <a:avLst/>
+          </a:prstGeom>
+          <a:solidFill>
+            <a:srgbClr val="264862"/>
+          </a:solidFill>
+          <a:ln/>
+        </p:spPr>
+      </p:sp>
+      <p:sp>
+        <p:nvSpPr>
+          <p:cNvPr id="21" name="Text 19"/>
+          <p:cNvSpPr/>
+          <p:nvPr/>
+        </p:nvSpPr>
+        <p:spPr>
+          <a:xfrm>
+            <a:off x="5925312" y="2331720"/>
+            <a:ext cx="2066544" cy="1956816"/>
           </a:xfrm>
           <a:prstGeom prst="rect">
             <a:avLst/>
@@ -7008,7 +7642,7 @@
             <a:r>
               <a:rPr lang="en-US" sz="1200" dirty="0">
                 <a:solidFill>
-                  <a:srgbClr val="E8EEF5"/>
+                  <a:srgbClr val="EAF1F8"/>
                 </a:solidFill>
                 <a:latin typeface="Calibri" pitchFamily="34" charset="0"/>
                 <a:ea typeface="Calibri" pitchFamily="34" charset="-122"/>
@@ -7029,7 +7663,7 @@
             <a:r>
               <a:rPr lang="en-US" sz="1200" dirty="0">
                 <a:solidFill>
-                  <a:srgbClr val="E8EEF5"/>
+                  <a:srgbClr val="EAF1F8"/>
                 </a:solidFill>
                 <a:latin typeface="Calibri" pitchFamily="34" charset="0"/>
                 <a:ea typeface="Calibri" pitchFamily="34" charset="-122"/>
@@ -7050,7 +7684,7 @@
             <a:r>
               <a:rPr lang="en-US" sz="1200" dirty="0">
                 <a:solidFill>
-                  <a:srgbClr val="E8EEF5"/>
+                  <a:srgbClr val="EAF1F8"/>
                 </a:solidFill>
                 <a:latin typeface="Calibri" pitchFamily="34" charset="0"/>
                 <a:ea typeface="Calibri" pitchFamily="34" charset="-122"/>
@@ -7076,7 +7710,7 @@
     <p:bg>
       <p:bgPr>
         <a:solidFill>
-          <a:srgbClr val="0B1B2B"/>
+          <a:srgbClr val="0A1622"/>
         </a:solidFill>
       </p:bgPr>
     </p:bg>
@@ -7114,6 +7748,13 @@
             <a:srgbClr val="22D3EE"/>
           </a:solidFill>
           <a:ln/>
+          <a:effectLst>
+            <a:outerShdw sx="100000" sy="100000" kx="0" ky="0" algn="bl" rotWithShape="0" blurRad="50800" dist="25400" dir="5400000">
+              <a:srgbClr val="000000">
+                <a:alpha val="40000"/>
+              </a:srgbClr>
+            </a:outerShdw>
+          </a:effectLst>
         </p:spPr>
       </p:sp>
       <p:sp>
@@ -7143,7 +7784,7 @@
             <a:r>
               <a:rPr lang="en-US" sz="2200" b="1" dirty="0">
                 <a:solidFill>
-                  <a:srgbClr val="0B1B2B"/>
+                  <a:srgbClr val="0A1622"/>
                 </a:solidFill>
                 <a:latin typeface="Consolas" pitchFamily="34" charset="0"/>
                 <a:ea typeface="Consolas" pitchFamily="34" charset="-122"/>
@@ -7241,14 +7882,36 @@
         </p:nvSpPr>
         <p:spPr>
           <a:xfrm>
+            <a:off x="1298448" y="1316736"/>
+            <a:ext cx="1005840" cy="32004"/>
+          </a:xfrm>
+          <a:prstGeom prst="rect">
+            <a:avLst/>
+          </a:prstGeom>
+          <a:solidFill>
+            <a:srgbClr val="22D3EE"/>
+          </a:solidFill>
+          <a:ln/>
+        </p:spPr>
+      </p:sp>
+      <p:sp>
+        <p:nvSpPr>
+          <p:cNvPr id="7" name="Shape 5"/>
+          <p:cNvSpPr/>
+          <p:nvPr/>
+        </p:nvSpPr>
+        <p:spPr>
+          <a:xfrm>
             <a:off x="548640" y="1691640"/>
             <a:ext cx="3886200" cy="1325880"/>
           </a:xfrm>
-          <a:prstGeom prst="rect">
-            <a:avLst/>
+          <a:prstGeom prst="roundRect">
+            <a:avLst>
+              <a:gd name="adj" fmla="val 3448"/>
+            </a:avLst>
           </a:prstGeom>
           <a:solidFill>
-            <a:srgbClr val="12293D"/>
+            <a:srgbClr val="13283C"/>
           </a:solidFill>
           <a:ln w="15875">
             <a:solidFill>
@@ -7256,18 +7919,25 @@
             </a:solidFill>
             <a:prstDash val="solid"/>
           </a:ln>
-        </p:spPr>
-      </p:sp>
-      <p:sp>
-        <p:nvSpPr>
-          <p:cNvPr id="7" name="Shape 5"/>
-          <p:cNvSpPr/>
-          <p:nvPr/>
-        </p:nvSpPr>
-        <p:spPr>
-          <a:xfrm>
-            <a:off x="548640" y="1691640"/>
-            <a:ext cx="82296" cy="1325880"/>
+          <a:effectLst>
+            <a:outerShdw sx="100000" sy="100000" kx="0" ky="0" algn="bl" rotWithShape="0" blurRad="88900" dist="38100" dir="5400000">
+              <a:srgbClr val="000000">
+                <a:alpha val="50000"/>
+              </a:srgbClr>
+            </a:outerShdw>
+          </a:effectLst>
+        </p:spPr>
+      </p:sp>
+      <p:sp>
+        <p:nvSpPr>
+          <p:cNvPr id="8" name="Shape 6"/>
+          <p:cNvSpPr/>
+          <p:nvPr/>
+        </p:nvSpPr>
+        <p:spPr>
+          <a:xfrm>
+            <a:off x="562356" y="1764792"/>
+            <a:ext cx="73152" cy="1179576"/>
           </a:xfrm>
           <a:prstGeom prst="rect">
             <a:avLst/>
@@ -7280,14 +7950,14 @@
       </p:sp>
       <p:sp>
         <p:nvSpPr>
-          <p:cNvPr id="8" name="Text 6"/>
-          <p:cNvSpPr/>
-          <p:nvPr/>
-        </p:nvSpPr>
-        <p:spPr>
-          <a:xfrm>
-            <a:off x="786384" y="1837944"/>
-            <a:ext cx="3502152" cy="384048"/>
+          <p:cNvPr id="9" name="Text 7"/>
+          <p:cNvSpPr/>
+          <p:nvPr/>
+        </p:nvSpPr>
+        <p:spPr>
+          <a:xfrm>
+            <a:off x="804672" y="1828800"/>
+            <a:ext cx="3483864" cy="384048"/>
           </a:xfrm>
           <a:prstGeom prst="rect">
             <a:avLst/>
@@ -7303,7 +7973,7 @@
               <a:buNone/>
             </a:pPr>
             <a:r>
-              <a:rPr lang="en-US" sz="1500" b="1" dirty="0">
+              <a:rPr lang="en-US" sz="1500" b="1" spc="50" kern="0" dirty="0">
                 <a:solidFill>
                   <a:srgbClr val="22D3EE"/>
                 </a:solidFill>
@@ -7319,14 +7989,34 @@
       </p:sp>
       <p:sp>
         <p:nvSpPr>
-          <p:cNvPr id="9" name="Text 7"/>
-          <p:cNvSpPr/>
-          <p:nvPr/>
-        </p:nvSpPr>
-        <p:spPr>
-          <a:xfrm>
-            <a:off x="786384" y="2276856"/>
-            <a:ext cx="3429000" cy="594360"/>
+          <p:cNvPr id="10" name="Shape 8"/>
+          <p:cNvSpPr/>
+          <p:nvPr/>
+        </p:nvSpPr>
+        <p:spPr>
+          <a:xfrm>
+            <a:off x="804672" y="2221992"/>
+            <a:ext cx="3374136" cy="16459"/>
+          </a:xfrm>
+          <a:prstGeom prst="rect">
+            <a:avLst/>
+          </a:prstGeom>
+          <a:solidFill>
+            <a:srgbClr val="264862"/>
+          </a:solidFill>
+          <a:ln/>
+        </p:spPr>
+      </p:sp>
+      <p:sp>
+        <p:nvSpPr>
+          <p:cNvPr id="11" name="Text 9"/>
+          <p:cNvSpPr/>
+          <p:nvPr/>
+        </p:nvSpPr>
+        <p:spPr>
+          <a:xfrm>
+            <a:off x="804672" y="2331720"/>
+            <a:ext cx="3410712" cy="539496"/>
           </a:xfrm>
           <a:prstGeom prst="rect">
             <a:avLst/>
@@ -7348,7 +8038,7 @@
             <a:r>
               <a:rPr lang="en-US" sz="1200" dirty="0">
                 <a:solidFill>
-                  <a:srgbClr val="E8EEF5"/>
+                  <a:srgbClr val="EAF1F8"/>
                 </a:solidFill>
                 <a:latin typeface="Calibri" pitchFamily="34" charset="0"/>
                 <a:ea typeface="Calibri" pitchFamily="34" charset="-122"/>
@@ -7362,7 +8052,7 @@
       </p:sp>
       <p:sp>
         <p:nvSpPr>
-          <p:cNvPr id="10" name="Shape 8"/>
+          <p:cNvPr id="12" name="Shape 10"/>
           <p:cNvSpPr/>
           <p:nvPr/>
         </p:nvSpPr>
@@ -7371,11 +8061,13 @@
             <a:off x="4663440" y="1691640"/>
             <a:ext cx="3931920" cy="1325880"/>
           </a:xfrm>
-          <a:prstGeom prst="rect">
-            <a:avLst/>
+          <a:prstGeom prst="roundRect">
+            <a:avLst>
+              <a:gd name="adj" fmla="val 3448"/>
+            </a:avLst>
           </a:prstGeom>
           <a:solidFill>
-            <a:srgbClr val="12293D"/>
+            <a:srgbClr val="13283C"/>
           </a:solidFill>
           <a:ln w="15875">
             <a:solidFill>
@@ -7383,18 +8075,25 @@
             </a:solidFill>
             <a:prstDash val="solid"/>
           </a:ln>
-        </p:spPr>
-      </p:sp>
-      <p:sp>
-        <p:nvSpPr>
-          <p:cNvPr id="11" name="Shape 9"/>
-          <p:cNvSpPr/>
-          <p:nvPr/>
-        </p:nvSpPr>
-        <p:spPr>
-          <a:xfrm>
-            <a:off x="4663440" y="1691640"/>
-            <a:ext cx="82296" cy="1325880"/>
+          <a:effectLst>
+            <a:outerShdw sx="100000" sy="100000" kx="0" ky="0" algn="bl" rotWithShape="0" blurRad="88900" dist="38100" dir="5400000">
+              <a:srgbClr val="000000">
+                <a:alpha val="50000"/>
+              </a:srgbClr>
+            </a:outerShdw>
+          </a:effectLst>
+        </p:spPr>
+      </p:sp>
+      <p:sp>
+        <p:nvSpPr>
+          <p:cNvPr id="13" name="Shape 11"/>
+          <p:cNvSpPr/>
+          <p:nvPr/>
+        </p:nvSpPr>
+        <p:spPr>
+          <a:xfrm>
+            <a:off x="4677156" y="1764792"/>
+            <a:ext cx="73152" cy="1179576"/>
           </a:xfrm>
           <a:prstGeom prst="rect">
             <a:avLst/>
@@ -7407,14 +8106,14 @@
       </p:sp>
       <p:sp>
         <p:nvSpPr>
-          <p:cNvPr id="12" name="Text 10"/>
-          <p:cNvSpPr/>
-          <p:nvPr/>
-        </p:nvSpPr>
-        <p:spPr>
-          <a:xfrm>
-            <a:off x="4901184" y="1837944"/>
-            <a:ext cx="3547872" cy="384048"/>
+          <p:cNvPr id="14" name="Text 12"/>
+          <p:cNvSpPr/>
+          <p:nvPr/>
+        </p:nvSpPr>
+        <p:spPr>
+          <a:xfrm>
+            <a:off x="4919472" y="1828800"/>
+            <a:ext cx="3529584" cy="384048"/>
           </a:xfrm>
           <a:prstGeom prst="rect">
             <a:avLst/>
@@ -7430,7 +8129,7 @@
               <a:buNone/>
             </a:pPr>
             <a:r>
-              <a:rPr lang="en-US" sz="1500" b="1" dirty="0">
+              <a:rPr lang="en-US" sz="1500" b="1" spc="50" kern="0" dirty="0">
                 <a:solidFill>
                   <a:srgbClr val="34D399"/>
                 </a:solidFill>
@@ -7446,14 +8145,34 @@
       </p:sp>
       <p:sp>
         <p:nvSpPr>
-          <p:cNvPr id="13" name="Text 11"/>
-          <p:cNvSpPr/>
-          <p:nvPr/>
-        </p:nvSpPr>
-        <p:spPr>
-          <a:xfrm>
-            <a:off x="4901184" y="2276856"/>
-            <a:ext cx="3474720" cy="594360"/>
+          <p:cNvPr id="15" name="Shape 13"/>
+          <p:cNvSpPr/>
+          <p:nvPr/>
+        </p:nvSpPr>
+        <p:spPr>
+          <a:xfrm>
+            <a:off x="4919472" y="2221992"/>
+            <a:ext cx="3419856" cy="16459"/>
+          </a:xfrm>
+          <a:prstGeom prst="rect">
+            <a:avLst/>
+          </a:prstGeom>
+          <a:solidFill>
+            <a:srgbClr val="264862"/>
+          </a:solidFill>
+          <a:ln/>
+        </p:spPr>
+      </p:sp>
+      <p:sp>
+        <p:nvSpPr>
+          <p:cNvPr id="16" name="Text 14"/>
+          <p:cNvSpPr/>
+          <p:nvPr/>
+        </p:nvSpPr>
+        <p:spPr>
+          <a:xfrm>
+            <a:off x="4919472" y="2331720"/>
+            <a:ext cx="3456432" cy="539496"/>
           </a:xfrm>
           <a:prstGeom prst="rect">
             <a:avLst/>
@@ -7475,7 +8194,7 @@
             <a:r>
               <a:rPr lang="en-US" sz="1200" dirty="0">
                 <a:solidFill>
-                  <a:srgbClr val="E8EEF5"/>
+                  <a:srgbClr val="EAF1F8"/>
                 </a:solidFill>
                 <a:latin typeface="Calibri" pitchFamily="34" charset="0"/>
                 <a:ea typeface="Calibri" pitchFamily="34" charset="-122"/>
@@ -7489,7 +8208,7 @@
       </p:sp>
       <p:sp>
         <p:nvSpPr>
-          <p:cNvPr id="14" name="Shape 12"/>
+          <p:cNvPr id="17" name="Shape 15"/>
           <p:cNvSpPr/>
           <p:nvPr/>
         </p:nvSpPr>
@@ -7498,11 +8217,13 @@
             <a:off x="548640" y="3154680"/>
             <a:ext cx="3886200" cy="1325880"/>
           </a:xfrm>
-          <a:prstGeom prst="rect">
-            <a:avLst/>
+          <a:prstGeom prst="roundRect">
+            <a:avLst>
+              <a:gd name="adj" fmla="val 3448"/>
+            </a:avLst>
           </a:prstGeom>
           <a:solidFill>
-            <a:srgbClr val="12293D"/>
+            <a:srgbClr val="13283C"/>
           </a:solidFill>
           <a:ln w="15875">
             <a:solidFill>
@@ -7510,18 +8231,25 @@
             </a:solidFill>
             <a:prstDash val="solid"/>
           </a:ln>
-        </p:spPr>
-      </p:sp>
-      <p:sp>
-        <p:nvSpPr>
-          <p:cNvPr id="15" name="Shape 13"/>
-          <p:cNvSpPr/>
-          <p:nvPr/>
-        </p:nvSpPr>
-        <p:spPr>
-          <a:xfrm>
-            <a:off x="548640" y="3154680"/>
-            <a:ext cx="82296" cy="1325880"/>
+          <a:effectLst>
+            <a:outerShdw sx="100000" sy="100000" kx="0" ky="0" algn="bl" rotWithShape="0" blurRad="88900" dist="38100" dir="5400000">
+              <a:srgbClr val="000000">
+                <a:alpha val="50000"/>
+              </a:srgbClr>
+            </a:outerShdw>
+          </a:effectLst>
+        </p:spPr>
+      </p:sp>
+      <p:sp>
+        <p:nvSpPr>
+          <p:cNvPr id="18" name="Shape 16"/>
+          <p:cNvSpPr/>
+          <p:nvPr/>
+        </p:nvSpPr>
+        <p:spPr>
+          <a:xfrm>
+            <a:off x="562356" y="3227832"/>
+            <a:ext cx="73152" cy="1179576"/>
           </a:xfrm>
           <a:prstGeom prst="rect">
             <a:avLst/>
@@ -7534,14 +8262,14 @@
       </p:sp>
       <p:sp>
         <p:nvSpPr>
-          <p:cNvPr id="16" name="Text 14"/>
-          <p:cNvSpPr/>
-          <p:nvPr/>
-        </p:nvSpPr>
-        <p:spPr>
-          <a:xfrm>
-            <a:off x="786384" y="3300984"/>
-            <a:ext cx="3502152" cy="384048"/>
+          <p:cNvPr id="19" name="Text 17"/>
+          <p:cNvSpPr/>
+          <p:nvPr/>
+        </p:nvSpPr>
+        <p:spPr>
+          <a:xfrm>
+            <a:off x="804672" y="3291840"/>
+            <a:ext cx="3483864" cy="384048"/>
           </a:xfrm>
           <a:prstGeom prst="rect">
             <a:avLst/>
@@ -7557,7 +8285,7 @@
               <a:buNone/>
             </a:pPr>
             <a:r>
-              <a:rPr lang="en-US" sz="1500" b="1" dirty="0">
+              <a:rPr lang="en-US" sz="1500" b="1" spc="50" kern="0" dirty="0">
                 <a:solidFill>
                   <a:srgbClr val="FBBF24"/>
                 </a:solidFill>
@@ -7573,14 +8301,34 @@
       </p:sp>
       <p:sp>
         <p:nvSpPr>
-          <p:cNvPr id="17" name="Text 15"/>
-          <p:cNvSpPr/>
-          <p:nvPr/>
-        </p:nvSpPr>
-        <p:spPr>
-          <a:xfrm>
-            <a:off x="786384" y="3739896"/>
-            <a:ext cx="3429000" cy="594360"/>
+          <p:cNvPr id="20" name="Shape 18"/>
+          <p:cNvSpPr/>
+          <p:nvPr/>
+        </p:nvSpPr>
+        <p:spPr>
+          <a:xfrm>
+            <a:off x="804672" y="3685032"/>
+            <a:ext cx="3374136" cy="16459"/>
+          </a:xfrm>
+          <a:prstGeom prst="rect">
+            <a:avLst/>
+          </a:prstGeom>
+          <a:solidFill>
+            <a:srgbClr val="264862"/>
+          </a:solidFill>
+          <a:ln/>
+        </p:spPr>
+      </p:sp>
+      <p:sp>
+        <p:nvSpPr>
+          <p:cNvPr id="21" name="Text 19"/>
+          <p:cNvSpPr/>
+          <p:nvPr/>
+        </p:nvSpPr>
+        <p:spPr>
+          <a:xfrm>
+            <a:off x="804672" y="3794760"/>
+            <a:ext cx="3410712" cy="539496"/>
           </a:xfrm>
           <a:prstGeom prst="rect">
             <a:avLst/>
@@ -7602,7 +8350,7 @@
             <a:r>
               <a:rPr lang="en-US" sz="1200" dirty="0">
                 <a:solidFill>
-                  <a:srgbClr val="E8EEF5"/>
+                  <a:srgbClr val="EAF1F8"/>
                 </a:solidFill>
                 <a:latin typeface="Calibri" pitchFamily="34" charset="0"/>
                 <a:ea typeface="Calibri" pitchFamily="34" charset="-122"/>
@@ -7616,7 +8364,7 @@
       </p:sp>
       <p:sp>
         <p:nvSpPr>
-          <p:cNvPr id="18" name="Shape 16"/>
+          <p:cNvPr id="22" name="Shape 20"/>
           <p:cNvSpPr/>
           <p:nvPr/>
         </p:nvSpPr>
@@ -7625,11 +8373,13 @@
             <a:off x="4663440" y="3154680"/>
             <a:ext cx="3931920" cy="1325880"/>
           </a:xfrm>
-          <a:prstGeom prst="rect">
-            <a:avLst/>
+          <a:prstGeom prst="roundRect">
+            <a:avLst>
+              <a:gd name="adj" fmla="val 3448"/>
+            </a:avLst>
           </a:prstGeom>
           <a:solidFill>
-            <a:srgbClr val="12293D"/>
+            <a:srgbClr val="13283C"/>
           </a:solidFill>
           <a:ln w="15875">
             <a:solidFill>
@@ -7637,18 +8387,25 @@
             </a:solidFill>
             <a:prstDash val="solid"/>
           </a:ln>
-        </p:spPr>
-      </p:sp>
-      <p:sp>
-        <p:nvSpPr>
-          <p:cNvPr id="19" name="Shape 17"/>
-          <p:cNvSpPr/>
-          <p:nvPr/>
-        </p:nvSpPr>
-        <p:spPr>
-          <a:xfrm>
-            <a:off x="4663440" y="3154680"/>
-            <a:ext cx="82296" cy="1325880"/>
+          <a:effectLst>
+            <a:outerShdw sx="100000" sy="100000" kx="0" ky="0" algn="bl" rotWithShape="0" blurRad="88900" dist="38100" dir="5400000">
+              <a:srgbClr val="000000">
+                <a:alpha val="50000"/>
+              </a:srgbClr>
+            </a:outerShdw>
+          </a:effectLst>
+        </p:spPr>
+      </p:sp>
+      <p:sp>
+        <p:nvSpPr>
+          <p:cNvPr id="23" name="Shape 21"/>
+          <p:cNvSpPr/>
+          <p:nvPr/>
+        </p:nvSpPr>
+        <p:spPr>
+          <a:xfrm>
+            <a:off x="4677156" y="3227832"/>
+            <a:ext cx="73152" cy="1179576"/>
           </a:xfrm>
           <a:prstGeom prst="rect">
             <a:avLst/>
@@ -7661,14 +8418,14 @@
       </p:sp>
       <p:sp>
         <p:nvSpPr>
-          <p:cNvPr id="20" name="Text 18"/>
-          <p:cNvSpPr/>
-          <p:nvPr/>
-        </p:nvSpPr>
-        <p:spPr>
-          <a:xfrm>
-            <a:off x="4901184" y="3300984"/>
-            <a:ext cx="3547872" cy="384048"/>
+          <p:cNvPr id="24" name="Text 22"/>
+          <p:cNvSpPr/>
+          <p:nvPr/>
+        </p:nvSpPr>
+        <p:spPr>
+          <a:xfrm>
+            <a:off x="4919472" y="3291840"/>
+            <a:ext cx="3529584" cy="384048"/>
           </a:xfrm>
           <a:prstGeom prst="rect">
             <a:avLst/>
@@ -7684,7 +8441,7 @@
               <a:buNone/>
             </a:pPr>
             <a:r>
-              <a:rPr lang="en-US" sz="1500" b="1" dirty="0">
+              <a:rPr lang="en-US" sz="1500" b="1" spc="50" kern="0" dirty="0">
                 <a:solidFill>
                   <a:srgbClr val="FB7185"/>
                 </a:solidFill>
@@ -7700,14 +8457,34 @@
       </p:sp>
       <p:sp>
         <p:nvSpPr>
-          <p:cNvPr id="21" name="Text 19"/>
-          <p:cNvSpPr/>
-          <p:nvPr/>
-        </p:nvSpPr>
-        <p:spPr>
-          <a:xfrm>
-            <a:off x="4901184" y="3739896"/>
-            <a:ext cx="3474720" cy="594360"/>
+          <p:cNvPr id="25" name="Shape 23"/>
+          <p:cNvSpPr/>
+          <p:nvPr/>
+        </p:nvSpPr>
+        <p:spPr>
+          <a:xfrm>
+            <a:off x="4919472" y="3685032"/>
+            <a:ext cx="3419856" cy="16459"/>
+          </a:xfrm>
+          <a:prstGeom prst="rect">
+            <a:avLst/>
+          </a:prstGeom>
+          <a:solidFill>
+            <a:srgbClr val="264862"/>
+          </a:solidFill>
+          <a:ln/>
+        </p:spPr>
+      </p:sp>
+      <p:sp>
+        <p:nvSpPr>
+          <p:cNvPr id="26" name="Text 24"/>
+          <p:cNvSpPr/>
+          <p:nvPr/>
+        </p:nvSpPr>
+        <p:spPr>
+          <a:xfrm>
+            <a:off x="4919472" y="3794760"/>
+            <a:ext cx="3456432" cy="539496"/>
           </a:xfrm>
           <a:prstGeom prst="rect">
             <a:avLst/>
@@ -7729,7 +8506,7 @@
             <a:r>
               <a:rPr lang="en-US" sz="1200" dirty="0">
                 <a:solidFill>
-                  <a:srgbClr val="E8EEF5"/>
+                  <a:srgbClr val="EAF1F8"/>
                 </a:solidFill>
                 <a:latin typeface="Calibri" pitchFamily="34" charset="0"/>
                 <a:ea typeface="Calibri" pitchFamily="34" charset="-122"/>
@@ -7755,7 +8532,7 @@
     <p:bg>
       <p:bgPr>
         <a:solidFill>
-          <a:srgbClr val="0B1B2B"/>
+          <a:srgbClr val="0A1622"/>
         </a:solidFill>
       </p:bgPr>
     </p:bg>
@@ -7793,6 +8570,13 @@
             <a:srgbClr val="22D3EE"/>
           </a:solidFill>
           <a:ln/>
+          <a:effectLst>
+            <a:outerShdw sx="100000" sy="100000" kx="0" ky="0" algn="bl" rotWithShape="0" blurRad="50800" dist="25400" dir="5400000">
+              <a:srgbClr val="000000">
+                <a:alpha val="40000"/>
+              </a:srgbClr>
+            </a:outerShdw>
+          </a:effectLst>
         </p:spPr>
       </p:sp>
       <p:sp>
@@ -7822,7 +8606,7 @@
             <a:r>
               <a:rPr lang="en-US" sz="2200" b="1" dirty="0">
                 <a:solidFill>
-                  <a:srgbClr val="0B1B2B"/>
+                  <a:srgbClr val="0A1622"/>
                 </a:solidFill>
                 <a:latin typeface="Consolas" pitchFamily="34" charset="0"/>
                 <a:ea typeface="Consolas" pitchFamily="34" charset="-122"/>
@@ -7911,6 +8695,26 @@
             <a:endParaRPr lang="en-US" sz="2500" dirty="0"/>
           </a:p>
         </p:txBody>
+      </p:sp>
+      <p:sp>
+        <p:nvSpPr>
+          <p:cNvPr id="6" name="Shape 4"/>
+          <p:cNvSpPr/>
+          <p:nvPr/>
+        </p:nvSpPr>
+        <p:spPr>
+          <a:xfrm>
+            <a:off x="1298448" y="1316736"/>
+            <a:ext cx="1005840" cy="32004"/>
+          </a:xfrm>
+          <a:prstGeom prst="rect">
+            <a:avLst/>
+          </a:prstGeom>
+          <a:solidFill>
+            <a:srgbClr val="22D3EE"/>
+          </a:solidFill>
+          <a:ln/>
+        </p:spPr>
       </p:sp>
       <p:graphicFrame>
         <p:nvGraphicFramePr>
@@ -7950,7 +8754,7 @@
                       <a:r>
                         <a:rPr lang="en-US" sz="1250" b="1" dirty="0">
                           <a:solidFill>
-                            <a:srgbClr val="0B1B2B"/>
+                            <a:srgbClr val="0A1622"/>
                           </a:solidFill>
                           <a:latin typeface="Calibri" pitchFamily="34" charset="0"/>
                           <a:ea typeface="Calibri" pitchFamily="34" charset="-122"/>
@@ -7965,10 +8769,10 @@
                       </a:endParaRPr>
                     </a:p>
                   </a:txBody>
-                  <a:tcPr marL="50800" marR="50800" marT="50800" marB="50800" anchor="ctr">
+                  <a:tcPr marL="76200" marR="76200" marT="76200" marB="76200" anchor="ctr">
                     <a:lnL w="12700" cap="flat" cmpd="sng" algn="ctr">
                       <a:solidFill>
-                        <a:srgbClr val="284963"/>
+                        <a:srgbClr val="264862"/>
                       </a:solidFill>
                       <a:prstDash val="solid"/>
                       <a:round/>
@@ -7977,7 +8781,7 @@
                     </a:lnL>
                     <a:lnR w="12700" cap="flat" cmpd="sng" algn="ctr">
                       <a:solidFill>
-                        <a:srgbClr val="284963"/>
+                        <a:srgbClr val="264862"/>
                       </a:solidFill>
                       <a:prstDash val="solid"/>
                       <a:round/>
@@ -7986,7 +8790,7 @@
                     </a:lnR>
                     <a:lnT w="12700" cap="flat" cmpd="sng" algn="ctr">
                       <a:solidFill>
-                        <a:srgbClr val="284963"/>
+                        <a:srgbClr val="264862"/>
                       </a:solidFill>
                       <a:prstDash val="solid"/>
                       <a:round/>
@@ -7995,7 +8799,7 @@
                     </a:lnT>
                     <a:lnB w="12700" cap="flat" cmpd="sng" algn="ctr">
                       <a:solidFill>
-                        <a:srgbClr val="284963"/>
+                        <a:srgbClr val="264862"/>
                       </a:solidFill>
                       <a:prstDash val="solid"/>
                       <a:round/>
@@ -8018,7 +8822,7 @@
                       <a:r>
                         <a:rPr lang="en-US" sz="1250" b="1" dirty="0">
                           <a:solidFill>
-                            <a:srgbClr val="0B1B2B"/>
+                            <a:srgbClr val="0A1622"/>
                           </a:solidFill>
                           <a:latin typeface="Calibri" pitchFamily="34" charset="0"/>
                           <a:ea typeface="Calibri" pitchFamily="34" charset="-122"/>
@@ -8033,10 +8837,10 @@
                       </a:endParaRPr>
                     </a:p>
                   </a:txBody>
-                  <a:tcPr marL="50800" marR="50800" marT="50800" marB="50800" anchor="ctr">
+                  <a:tcPr marL="76200" marR="76200" marT="76200" marB="76200" anchor="ctr">
                     <a:lnL w="12700" cap="flat" cmpd="sng" algn="ctr">
                       <a:solidFill>
-                        <a:srgbClr val="284963"/>
+                        <a:srgbClr val="264862"/>
                       </a:solidFill>
                       <a:prstDash val="solid"/>
                       <a:round/>
@@ -8045,7 +8849,7 @@
                     </a:lnL>
                     <a:lnR w="12700" cap="flat" cmpd="sng" algn="ctr">
                       <a:solidFill>
-                        <a:srgbClr val="284963"/>
+                        <a:srgbClr val="264862"/>
                       </a:solidFill>
                       <a:prstDash val="solid"/>
                       <a:round/>
@@ -8054,7 +8858,7 @@
                     </a:lnR>
                     <a:lnT w="12700" cap="flat" cmpd="sng" algn="ctr">
                       <a:solidFill>
-                        <a:srgbClr val="284963"/>
+                        <a:srgbClr val="264862"/>
                       </a:solidFill>
                       <a:prstDash val="solid"/>
                       <a:round/>
@@ -8063,7 +8867,7 @@
                     </a:lnT>
                     <a:lnB w="12700" cap="flat" cmpd="sng" algn="ctr">
                       <a:solidFill>
-                        <a:srgbClr val="284963"/>
+                        <a:srgbClr val="264862"/>
                       </a:solidFill>
                       <a:prstDash val="solid"/>
                       <a:round/>
@@ -8088,7 +8892,7 @@
                       <a:r>
                         <a:rPr lang="en-US" sz="1150" dirty="0">
                           <a:solidFill>
-                            <a:srgbClr val="E8EEF5"/>
+                            <a:srgbClr val="EAF1F8"/>
                           </a:solidFill>
                           <a:latin typeface="Calibri" pitchFamily="34" charset="0"/>
                           <a:ea typeface="Calibri" pitchFamily="34" charset="-122"/>
@@ -8103,10 +8907,10 @@
                       </a:endParaRPr>
                     </a:p>
                   </a:txBody>
-                  <a:tcPr marL="50800" marR="50800" marT="50800" marB="50800" anchor="ctr">
+                  <a:tcPr marL="76200" marR="76200" marT="76200" marB="76200" anchor="ctr">
                     <a:lnL w="12700" cap="flat" cmpd="sng" algn="ctr">
                       <a:solidFill>
-                        <a:srgbClr val="284963"/>
+                        <a:srgbClr val="264862"/>
                       </a:solidFill>
                       <a:prstDash val="solid"/>
                       <a:round/>
@@ -8115,7 +8919,7 @@
                     </a:lnL>
                     <a:lnR w="12700" cap="flat" cmpd="sng" algn="ctr">
                       <a:solidFill>
-                        <a:srgbClr val="284963"/>
+                        <a:srgbClr val="264862"/>
                       </a:solidFill>
                       <a:prstDash val="solid"/>
                       <a:round/>
@@ -8124,7 +8928,7 @@
                     </a:lnR>
                     <a:lnT w="12700" cap="flat" cmpd="sng" algn="ctr">
                       <a:solidFill>
-                        <a:srgbClr val="284963"/>
+                        <a:srgbClr val="264862"/>
                       </a:solidFill>
                       <a:prstDash val="solid"/>
                       <a:round/>
@@ -8133,7 +8937,7 @@
                     </a:lnT>
                     <a:lnB w="12700" cap="flat" cmpd="sng" algn="ctr">
                       <a:solidFill>
-                        <a:srgbClr val="284963"/>
+                        <a:srgbClr val="264862"/>
                       </a:solidFill>
                       <a:prstDash val="solid"/>
                       <a:round/>
@@ -8141,7 +8945,7 @@
                       <a:tailEnd type="none" w="med" len="med"/>
                     </a:lnB>
                     <a:solidFill>
-                      <a:srgbClr val="16314A"/>
+                      <a:srgbClr val="0F2133"/>
                     </a:solidFill>
                   </a:tcPr>
                 </a:tc>
@@ -8156,7 +8960,7 @@
                       <a:r>
                         <a:rPr lang="en-US" sz="1150" dirty="0">
                           <a:solidFill>
-                            <a:srgbClr val="E8EEF5"/>
+                            <a:srgbClr val="EAF1F8"/>
                           </a:solidFill>
                           <a:latin typeface="Calibri" pitchFamily="34" charset="0"/>
                           <a:ea typeface="Calibri" pitchFamily="34" charset="-122"/>
@@ -8171,10 +8975,10 @@
                       </a:endParaRPr>
                     </a:p>
                   </a:txBody>
-                  <a:tcPr marL="50800" marR="50800" marT="50800" marB="50800" anchor="ctr">
+                  <a:tcPr marL="76200" marR="76200" marT="76200" marB="76200" anchor="ctr">
                     <a:lnL w="12700" cap="flat" cmpd="sng" algn="ctr">
                       <a:solidFill>
-                        <a:srgbClr val="284963"/>
+                        <a:srgbClr val="264862"/>
                       </a:solidFill>
                       <a:prstDash val="solid"/>
                       <a:round/>
@@ -8183,7 +8987,7 @@
                     </a:lnL>
                     <a:lnR w="12700" cap="flat" cmpd="sng" algn="ctr">
                       <a:solidFill>
-                        <a:srgbClr val="284963"/>
+                        <a:srgbClr val="264862"/>
                       </a:solidFill>
                       <a:prstDash val="solid"/>
                       <a:round/>
@@ -8192,7 +8996,7 @@
                     </a:lnR>
                     <a:lnT w="12700" cap="flat" cmpd="sng" algn="ctr">
                       <a:solidFill>
-                        <a:srgbClr val="284963"/>
+                        <a:srgbClr val="264862"/>
                       </a:solidFill>
                       <a:prstDash val="solid"/>
                       <a:round/>
@@ -8201,7 +9005,7 @@
                     </a:lnT>
                     <a:lnB w="12700" cap="flat" cmpd="sng" algn="ctr">
                       <a:solidFill>
-                        <a:srgbClr val="284963"/>
+                        <a:srgbClr val="264862"/>
                       </a:solidFill>
                       <a:prstDash val="solid"/>
                       <a:round/>
@@ -8209,7 +9013,7 @@
                       <a:tailEnd type="none" w="med" len="med"/>
                     </a:lnB>
                     <a:solidFill>
-                      <a:srgbClr val="16314A"/>
+                      <a:srgbClr val="0F2133"/>
                     </a:solidFill>
                   </a:tcPr>
                 </a:tc>
@@ -8226,7 +9030,7 @@
                       <a:r>
                         <a:rPr lang="en-US" sz="1150" dirty="0">
                           <a:solidFill>
-                            <a:srgbClr val="E8EEF5"/>
+                            <a:srgbClr val="EAF1F8"/>
                           </a:solidFill>
                           <a:latin typeface="Calibri" pitchFamily="34" charset="0"/>
                           <a:ea typeface="Calibri" pitchFamily="34" charset="-122"/>
@@ -8241,10 +9045,10 @@
                       </a:endParaRPr>
                     </a:p>
                   </a:txBody>
-                  <a:tcPr marL="50800" marR="50800" marT="50800" marB="50800" anchor="ctr">
+                  <a:tcPr marL="76200" marR="76200" marT="76200" marB="76200" anchor="ctr">
                     <a:lnL w="12700" cap="flat" cmpd="sng" algn="ctr">
                       <a:solidFill>
-                        <a:srgbClr val="284963"/>
+                        <a:srgbClr val="264862"/>
                       </a:solidFill>
                       <a:prstDash val="solid"/>
                       <a:round/>
@@ -8253,7 +9057,7 @@
                     </a:lnL>
                     <a:lnR w="12700" cap="flat" cmpd="sng" algn="ctr">
                       <a:solidFill>
-                        <a:srgbClr val="284963"/>
+                        <a:srgbClr val="264862"/>
                       </a:solidFill>
                       <a:prstDash val="solid"/>
                       <a:round/>
@@ -8262,7 +9066,7 @@
                     </a:lnR>
                     <a:lnT w="12700" cap="flat" cmpd="sng" algn="ctr">
                       <a:solidFill>
-                        <a:srgbClr val="284963"/>
+                        <a:srgbClr val="264862"/>
                       </a:solidFill>
                       <a:prstDash val="solid"/>
                       <a:round/>
@@ -8271,7 +9075,7 @@
                     </a:lnT>
                     <a:lnB w="12700" cap="flat" cmpd="sng" algn="ctr">
                       <a:solidFill>
-                        <a:srgbClr val="284963"/>
+                        <a:srgbClr val="264862"/>
                       </a:solidFill>
                       <a:prstDash val="solid"/>
                       <a:round/>
@@ -8279,7 +9083,7 @@
                       <a:tailEnd type="none" w="med" len="med"/>
                     </a:lnB>
                     <a:solidFill>
-                      <a:srgbClr val="12293D"/>
+                      <a:srgbClr val="13283C"/>
                     </a:solidFill>
                   </a:tcPr>
                 </a:tc>
@@ -8294,7 +9098,7 @@
                       <a:r>
                         <a:rPr lang="en-US" sz="1150" dirty="0">
                           <a:solidFill>
-                            <a:srgbClr val="E8EEF5"/>
+                            <a:srgbClr val="EAF1F8"/>
                           </a:solidFill>
                           <a:latin typeface="Calibri" pitchFamily="34" charset="0"/>
                           <a:ea typeface="Calibri" pitchFamily="34" charset="-122"/>
@@ -8309,10 +9113,10 @@
                       </a:endParaRPr>
                     </a:p>
                   </a:txBody>
-                  <a:tcPr marL="50800" marR="50800" marT="50800" marB="50800" anchor="ctr">
+                  <a:tcPr marL="76200" marR="76200" marT="76200" marB="76200" anchor="ctr">
                     <a:lnL w="12700" cap="flat" cmpd="sng" algn="ctr">
                       <a:solidFill>
-                        <a:srgbClr val="284963"/>
+                        <a:srgbClr val="264862"/>
                       </a:solidFill>
                       <a:prstDash val="solid"/>
                       <a:round/>
@@ -8321,7 +9125,7 @@
                     </a:lnL>
                     <a:lnR w="12700" cap="flat" cmpd="sng" algn="ctr">
                       <a:solidFill>
-                        <a:srgbClr val="284963"/>
+                        <a:srgbClr val="264862"/>
                       </a:solidFill>
                       <a:prstDash val="solid"/>
                       <a:round/>
@@ -8330,7 +9134,7 @@
                     </a:lnR>
                     <a:lnT w="12700" cap="flat" cmpd="sng" algn="ctr">
                       <a:solidFill>
-                        <a:srgbClr val="284963"/>
+                        <a:srgbClr val="264862"/>
                       </a:solidFill>
                       <a:prstDash val="solid"/>
                       <a:round/>
@@ -8339,7 +9143,7 @@
                     </a:lnT>
                     <a:lnB w="12700" cap="flat" cmpd="sng" algn="ctr">
                       <a:solidFill>
-                        <a:srgbClr val="284963"/>
+                        <a:srgbClr val="264862"/>
                       </a:solidFill>
                       <a:prstDash val="solid"/>
                       <a:round/>
@@ -8347,7 +9151,7 @@
                       <a:tailEnd type="none" w="med" len="med"/>
                     </a:lnB>
                     <a:solidFill>
-                      <a:srgbClr val="12293D"/>
+                      <a:srgbClr val="13283C"/>
                     </a:solidFill>
                   </a:tcPr>
                 </a:tc>
@@ -8364,7 +9168,7 @@
                       <a:r>
                         <a:rPr lang="en-US" sz="1150" dirty="0">
                           <a:solidFill>
-                            <a:srgbClr val="E8EEF5"/>
+                            <a:srgbClr val="EAF1F8"/>
                           </a:solidFill>
                           <a:latin typeface="Calibri" pitchFamily="34" charset="0"/>
                           <a:ea typeface="Calibri" pitchFamily="34" charset="-122"/>
@@ -8379,10 +9183,10 @@
                       </a:endParaRPr>
                     </a:p>
                   </a:txBody>
-                  <a:tcPr marL="50800" marR="50800" marT="50800" marB="50800" anchor="ctr">
+                  <a:tcPr marL="76200" marR="76200" marT="76200" marB="76200" anchor="ctr">
                     <a:lnL w="12700" cap="flat" cmpd="sng" algn="ctr">
                       <a:solidFill>
-                        <a:srgbClr val="284963"/>
+                        <a:srgbClr val="264862"/>
                       </a:solidFill>
                       <a:prstDash val="solid"/>
                       <a:round/>
@@ -8391,7 +9195,7 @@
                     </a:lnL>
                     <a:lnR w="12700" cap="flat" cmpd="sng" algn="ctr">
                       <a:solidFill>
-                        <a:srgbClr val="284963"/>
+                        <a:srgbClr val="264862"/>
                       </a:solidFill>
                       <a:prstDash val="solid"/>
                       <a:round/>
@@ -8400,7 +9204,7 @@
                     </a:lnR>
                     <a:lnT w="12700" cap="flat" cmpd="sng" algn="ctr">
                       <a:solidFill>
-                        <a:srgbClr val="284963"/>
+                        <a:srgbClr val="264862"/>
                       </a:solidFill>
                       <a:prstDash val="solid"/>
                       <a:round/>
@@ -8409,7 +9213,7 @@
                     </a:lnT>
                     <a:lnB w="12700" cap="flat" cmpd="sng" algn="ctr">
                       <a:solidFill>
-                        <a:srgbClr val="284963"/>
+                        <a:srgbClr val="264862"/>
                       </a:solidFill>
                       <a:prstDash val="solid"/>
                       <a:round/>
@@ -8417,7 +9221,7 @@
                       <a:tailEnd type="none" w="med" len="med"/>
                     </a:lnB>
                     <a:solidFill>
-                      <a:srgbClr val="16314A"/>
+                      <a:srgbClr val="0F2133"/>
                     </a:solidFill>
                   </a:tcPr>
                 </a:tc>
@@ -8432,7 +9236,7 @@
                       <a:r>
                         <a:rPr lang="en-US" sz="1150" dirty="0">
                           <a:solidFill>
-                            <a:srgbClr val="E8EEF5"/>
+                            <a:srgbClr val="EAF1F8"/>
                           </a:solidFill>
                           <a:latin typeface="Calibri" pitchFamily="34" charset="0"/>
                           <a:ea typeface="Calibri" pitchFamily="34" charset="-122"/>
@@ -8447,10 +9251,10 @@
                       </a:endParaRPr>
                     </a:p>
                   </a:txBody>
-                  <a:tcPr marL="50800" marR="50800" marT="50800" marB="50800" anchor="ctr">
+                  <a:tcPr marL="76200" marR="76200" marT="76200" marB="76200" anchor="ctr">
                     <a:lnL w="12700" cap="flat" cmpd="sng" algn="ctr">
                       <a:solidFill>
-                        <a:srgbClr val="284963"/>
+                        <a:srgbClr val="264862"/>
                       </a:solidFill>
                       <a:prstDash val="solid"/>
                       <a:round/>
@@ -8459,7 +9263,7 @@
                     </a:lnL>
                     <a:lnR w="12700" cap="flat" cmpd="sng" algn="ctr">
                       <a:solidFill>
-                        <a:srgbClr val="284963"/>
+                        <a:srgbClr val="264862"/>
                       </a:solidFill>
                       <a:prstDash val="solid"/>
                       <a:round/>
@@ -8468,7 +9272,7 @@
                     </a:lnR>
                     <a:lnT w="12700" cap="flat" cmpd="sng" algn="ctr">
                       <a:solidFill>
-                        <a:srgbClr val="284963"/>
+                        <a:srgbClr val="264862"/>
                       </a:solidFill>
                       <a:prstDash val="solid"/>
                       <a:round/>
@@ -8477,7 +9281,7 @@
                     </a:lnT>
                     <a:lnB w="12700" cap="flat" cmpd="sng" algn="ctr">
                       <a:solidFill>
-                        <a:srgbClr val="284963"/>
+                        <a:srgbClr val="264862"/>
                       </a:solidFill>
                       <a:prstDash val="solid"/>
                       <a:round/>
@@ -8485,7 +9289,7 @@
                       <a:tailEnd type="none" w="med" len="med"/>
                     </a:lnB>
                     <a:solidFill>
-                      <a:srgbClr val="16314A"/>
+                      <a:srgbClr val="0F2133"/>
                     </a:solidFill>
                   </a:tcPr>
                 </a:tc>
@@ -8502,7 +9306,7 @@
                       <a:r>
                         <a:rPr lang="en-US" sz="1150" dirty="0">
                           <a:solidFill>
-                            <a:srgbClr val="E8EEF5"/>
+                            <a:srgbClr val="EAF1F8"/>
                           </a:solidFill>
                           <a:latin typeface="Calibri" pitchFamily="34" charset="0"/>
                           <a:ea typeface="Calibri" pitchFamily="34" charset="-122"/>
@@ -8517,10 +9321,10 @@
                       </a:endParaRPr>
                     </a:p>
                   </a:txBody>
-                  <a:tcPr marL="50800" marR="50800" marT="50800" marB="50800" anchor="ctr">
+                  <a:tcPr marL="76200" marR="76200" marT="76200" marB="76200" anchor="ctr">
                     <a:lnL w="12700" cap="flat" cmpd="sng" algn="ctr">
                       <a:solidFill>
-                        <a:srgbClr val="284963"/>
+                        <a:srgbClr val="264862"/>
                       </a:solidFill>
                       <a:prstDash val="solid"/>
                       <a:round/>
@@ -8529,7 +9333,7 @@
                     </a:lnL>
                     <a:lnR w="12700" cap="flat" cmpd="sng" algn="ctr">
                       <a:solidFill>
-                        <a:srgbClr val="284963"/>
+                        <a:srgbClr val="264862"/>
                       </a:solidFill>
                       <a:prstDash val="solid"/>
                       <a:round/>
@@ -8538,7 +9342,7 @@
                     </a:lnR>
                     <a:lnT w="12700" cap="flat" cmpd="sng" algn="ctr">
                       <a:solidFill>
-                        <a:srgbClr val="284963"/>
+                        <a:srgbClr val="264862"/>
                       </a:solidFill>
                       <a:prstDash val="solid"/>
                       <a:round/>
@@ -8547,7 +9351,7 @@
                     </a:lnT>
                     <a:lnB w="12700" cap="flat" cmpd="sng" algn="ctr">
                       <a:solidFill>
-                        <a:srgbClr val="284963"/>
+                        <a:srgbClr val="264862"/>
                       </a:solidFill>
                       <a:prstDash val="solid"/>
                       <a:round/>
@@ -8555,7 +9359,7 @@
                       <a:tailEnd type="none" w="med" len="med"/>
                     </a:lnB>
                     <a:solidFill>
-                      <a:srgbClr val="12293D"/>
+                      <a:srgbClr val="13283C"/>
                     </a:solidFill>
                   </a:tcPr>
                 </a:tc>
@@ -8570,7 +9374,7 @@
                       <a:r>
                         <a:rPr lang="en-US" sz="1150" dirty="0">
                           <a:solidFill>
-                            <a:srgbClr val="E8EEF5"/>
+                            <a:srgbClr val="EAF1F8"/>
                           </a:solidFill>
                           <a:latin typeface="Calibri" pitchFamily="34" charset="0"/>
                           <a:ea typeface="Calibri" pitchFamily="34" charset="-122"/>
@@ -8585,10 +9389,10 @@
                       </a:endParaRPr>
                     </a:p>
                   </a:txBody>
-                  <a:tcPr marL="50800" marR="50800" marT="50800" marB="50800" anchor="ctr">
+                  <a:tcPr marL="76200" marR="76200" marT="76200" marB="76200" anchor="ctr">
                     <a:lnL w="12700" cap="flat" cmpd="sng" algn="ctr">
                       <a:solidFill>
-                        <a:srgbClr val="284963"/>
+                        <a:srgbClr val="264862"/>
                       </a:solidFill>
                       <a:prstDash val="solid"/>
                       <a:round/>
@@ -8597,7 +9401,7 @@
                     </a:lnL>
                     <a:lnR w="12700" cap="flat" cmpd="sng" algn="ctr">
                       <a:solidFill>
-                        <a:srgbClr val="284963"/>
+                        <a:srgbClr val="264862"/>
                       </a:solidFill>
                       <a:prstDash val="solid"/>
                       <a:round/>
@@ -8606,7 +9410,7 @@
                     </a:lnR>
                     <a:lnT w="12700" cap="flat" cmpd="sng" algn="ctr">
                       <a:solidFill>
-                        <a:srgbClr val="284963"/>
+                        <a:srgbClr val="264862"/>
                       </a:solidFill>
                       <a:prstDash val="solid"/>
                       <a:round/>
@@ -8615,7 +9419,7 @@
                     </a:lnT>
                     <a:lnB w="12700" cap="flat" cmpd="sng" algn="ctr">
                       <a:solidFill>
-                        <a:srgbClr val="284963"/>
+                        <a:srgbClr val="264862"/>
                       </a:solidFill>
                       <a:prstDash val="solid"/>
                       <a:round/>
@@ -8623,7 +9427,7 @@
                       <a:tailEnd type="none" w="med" len="med"/>
                     </a:lnB>
                     <a:solidFill>
-                      <a:srgbClr val="12293D"/>
+                      <a:srgbClr val="13283C"/>
                     </a:solidFill>
                   </a:tcPr>
                 </a:tc>
@@ -8640,7 +9444,7 @@
                       <a:r>
                         <a:rPr lang="en-US" sz="1150" dirty="0">
                           <a:solidFill>
-                            <a:srgbClr val="E8EEF5"/>
+                            <a:srgbClr val="EAF1F8"/>
                           </a:solidFill>
                           <a:latin typeface="Calibri" pitchFamily="34" charset="0"/>
                           <a:ea typeface="Calibri" pitchFamily="34" charset="-122"/>
@@ -8655,10 +9459,10 @@
                       </a:endParaRPr>
                     </a:p>
                   </a:txBody>
-                  <a:tcPr marL="50800" marR="50800" marT="50800" marB="50800" anchor="ctr">
+                  <a:tcPr marL="76200" marR="76200" marT="76200" marB="76200" anchor="ctr">
                     <a:lnL w="12700" cap="flat" cmpd="sng" algn="ctr">
                       <a:solidFill>
-                        <a:srgbClr val="284963"/>
+                        <a:srgbClr val="264862"/>
                       </a:solidFill>
                       <a:prstDash val="solid"/>
                       <a:round/>
@@ -8667,7 +9471,7 @@
                     </a:lnL>
                     <a:lnR w="12700" cap="flat" cmpd="sng" algn="ctr">
                       <a:solidFill>
-                        <a:srgbClr val="284963"/>
+                        <a:srgbClr val="264862"/>
                       </a:solidFill>
                       <a:prstDash val="solid"/>
                       <a:round/>
@@ -8676,7 +9480,7 @@
                     </a:lnR>
                     <a:lnT w="12700" cap="flat" cmpd="sng" algn="ctr">
                       <a:solidFill>
-                        <a:srgbClr val="284963"/>
+                        <a:srgbClr val="264862"/>
                       </a:solidFill>
                       <a:prstDash val="solid"/>
                       <a:round/>
@@ -8685,7 +9489,7 @@
                     </a:lnT>
                     <a:lnB w="12700" cap="flat" cmpd="sng" algn="ctr">
                       <a:solidFill>
-                        <a:srgbClr val="284963"/>
+                        <a:srgbClr val="264862"/>
                       </a:solidFill>
                       <a:prstDash val="solid"/>
                       <a:round/>
@@ -8693,7 +9497,7 @@
                       <a:tailEnd type="none" w="med" len="med"/>
                     </a:lnB>
                     <a:solidFill>
-                      <a:srgbClr val="16314A"/>
+                      <a:srgbClr val="0F2133"/>
                     </a:solidFill>
                   </a:tcPr>
                 </a:tc>
@@ -8708,7 +9512,7 @@
                       <a:r>
                         <a:rPr lang="en-US" sz="1150" dirty="0">
                           <a:solidFill>
-                            <a:srgbClr val="E8EEF5"/>
+                            <a:srgbClr val="EAF1F8"/>
                           </a:solidFill>
                           <a:latin typeface="Calibri" pitchFamily="34" charset="0"/>
                           <a:ea typeface="Calibri" pitchFamily="34" charset="-122"/>
@@ -8723,10 +9527,10 @@
                       </a:endParaRPr>
                     </a:p>
                   </a:txBody>
-                  <a:tcPr marL="50800" marR="50800" marT="50800" marB="50800" anchor="ctr">
+                  <a:tcPr marL="76200" marR="76200" marT="76200" marB="76200" anchor="ctr">
                     <a:lnL w="12700" cap="flat" cmpd="sng" algn="ctr">
                       <a:solidFill>
-                        <a:srgbClr val="284963"/>
+                        <a:srgbClr val="264862"/>
                       </a:solidFill>
                       <a:prstDash val="solid"/>
                       <a:round/>
@@ -8735,7 +9539,7 @@
                     </a:lnL>
                     <a:lnR w="12700" cap="flat" cmpd="sng" algn="ctr">
                       <a:solidFill>
-                        <a:srgbClr val="284963"/>
+                        <a:srgbClr val="264862"/>
                       </a:solidFill>
                       <a:prstDash val="solid"/>
                       <a:round/>
@@ -8744,7 +9548,7 @@
                     </a:lnR>
                     <a:lnT w="12700" cap="flat" cmpd="sng" algn="ctr">
                       <a:solidFill>
-                        <a:srgbClr val="284963"/>
+                        <a:srgbClr val="264862"/>
                       </a:solidFill>
                       <a:prstDash val="solid"/>
                       <a:round/>
@@ -8753,7 +9557,7 @@
                     </a:lnT>
                     <a:lnB w="12700" cap="flat" cmpd="sng" algn="ctr">
                       <a:solidFill>
-                        <a:srgbClr val="284963"/>
+                        <a:srgbClr val="264862"/>
                       </a:solidFill>
                       <a:prstDash val="solid"/>
                       <a:round/>
@@ -8761,7 +9565,7 @@
                       <a:tailEnd type="none" w="med" len="med"/>
                     </a:lnB>
                     <a:solidFill>
-                      <a:srgbClr val="16314A"/>
+                      <a:srgbClr val="0F2133"/>
                     </a:solidFill>
                   </a:tcPr>
                 </a:tc>
@@ -8784,7 +9588,7 @@
     <p:bg>
       <p:bgPr>
         <a:solidFill>
-          <a:srgbClr val="0B1B2B"/>
+          <a:srgbClr val="0A1622"/>
         </a:solidFill>
       </p:bgPr>
     </p:bg>
@@ -8822,6 +9626,13 @@
             <a:srgbClr val="22D3EE"/>
           </a:solidFill>
           <a:ln/>
+          <a:effectLst>
+            <a:outerShdw sx="100000" sy="100000" kx="0" ky="0" algn="bl" rotWithShape="0" blurRad="50800" dist="25400" dir="5400000">
+              <a:srgbClr val="000000">
+                <a:alpha val="40000"/>
+              </a:srgbClr>
+            </a:outerShdw>
+          </a:effectLst>
         </p:spPr>
       </p:sp>
       <p:sp>
@@ -8851,7 +9662,7 @@
             <a:r>
               <a:rPr lang="en-US" sz="2200" b="1" dirty="0">
                 <a:solidFill>
-                  <a:srgbClr val="0B1B2B"/>
+                  <a:srgbClr val="0A1622"/>
                 </a:solidFill>
                 <a:latin typeface="Consolas" pitchFamily="34" charset="0"/>
                 <a:ea typeface="Consolas" pitchFamily="34" charset="-122"/>
@@ -8949,14 +9760,36 @@
         </p:nvSpPr>
         <p:spPr>
           <a:xfrm>
+            <a:off x="1298448" y="1316736"/>
+            <a:ext cx="1005840" cy="32004"/>
+          </a:xfrm>
+          <a:prstGeom prst="rect">
+            <a:avLst/>
+          </a:prstGeom>
+          <a:solidFill>
+            <a:srgbClr val="22D3EE"/>
+          </a:solidFill>
+          <a:ln/>
+        </p:spPr>
+      </p:sp>
+      <p:sp>
+        <p:nvSpPr>
+          <p:cNvPr id="7" name="Shape 5"/>
+          <p:cNvSpPr/>
+          <p:nvPr/>
+        </p:nvSpPr>
+        <p:spPr>
+          <a:xfrm>
             <a:off x="548640" y="1691640"/>
             <a:ext cx="2542032" cy="2743200"/>
           </a:xfrm>
-          <a:prstGeom prst="rect">
-            <a:avLst/>
+          <a:prstGeom prst="roundRect">
+            <a:avLst>
+              <a:gd name="adj" fmla="val 1799"/>
+            </a:avLst>
           </a:prstGeom>
           <a:solidFill>
-            <a:srgbClr val="12293D"/>
+            <a:srgbClr val="13283C"/>
           </a:solidFill>
           <a:ln w="15875">
             <a:solidFill>
@@ -8964,18 +9797,25 @@
             </a:solidFill>
             <a:prstDash val="solid"/>
           </a:ln>
-        </p:spPr>
-      </p:sp>
-      <p:sp>
-        <p:nvSpPr>
-          <p:cNvPr id="7" name="Shape 5"/>
-          <p:cNvSpPr/>
-          <p:nvPr/>
-        </p:nvSpPr>
-        <p:spPr>
-          <a:xfrm>
-            <a:off x="548640" y="1691640"/>
-            <a:ext cx="82296" cy="2743200"/>
+          <a:effectLst>
+            <a:outerShdw sx="100000" sy="100000" kx="0" ky="0" algn="bl" rotWithShape="0" blurRad="88900" dist="38100" dir="5400000">
+              <a:srgbClr val="000000">
+                <a:alpha val="50000"/>
+              </a:srgbClr>
+            </a:outerShdw>
+          </a:effectLst>
+        </p:spPr>
+      </p:sp>
+      <p:sp>
+        <p:nvSpPr>
+          <p:cNvPr id="8" name="Shape 6"/>
+          <p:cNvSpPr/>
+          <p:nvPr/>
+        </p:nvSpPr>
+        <p:spPr>
+          <a:xfrm>
+            <a:off x="562356" y="1764792"/>
+            <a:ext cx="73152" cy="2596896"/>
           </a:xfrm>
           <a:prstGeom prst="rect">
             <a:avLst/>
@@ -8988,14 +9828,14 @@
       </p:sp>
       <p:sp>
         <p:nvSpPr>
-          <p:cNvPr id="8" name="Text 6"/>
-          <p:cNvSpPr/>
-          <p:nvPr/>
-        </p:nvSpPr>
-        <p:spPr>
-          <a:xfrm>
-            <a:off x="786384" y="1837944"/>
-            <a:ext cx="2157984" cy="384048"/>
+          <p:cNvPr id="9" name="Text 7"/>
+          <p:cNvSpPr/>
+          <p:nvPr/>
+        </p:nvSpPr>
+        <p:spPr>
+          <a:xfrm>
+            <a:off x="804672" y="1828800"/>
+            <a:ext cx="2139696" cy="384048"/>
           </a:xfrm>
           <a:prstGeom prst="rect">
             <a:avLst/>
@@ -9011,7 +9851,7 @@
               <a:buNone/>
             </a:pPr>
             <a:r>
-              <a:rPr lang="en-US" sz="1500" b="1" dirty="0">
+              <a:rPr lang="en-US" sz="1500" b="1" spc="50" kern="0" dirty="0">
                 <a:solidFill>
                   <a:srgbClr val="22D3EE"/>
                 </a:solidFill>
@@ -9027,14 +9867,34 @@
       </p:sp>
       <p:sp>
         <p:nvSpPr>
-          <p:cNvPr id="9" name="Text 7"/>
-          <p:cNvSpPr/>
-          <p:nvPr/>
-        </p:nvSpPr>
-        <p:spPr>
-          <a:xfrm>
-            <a:off x="786384" y="2276856"/>
-            <a:ext cx="2084832" cy="2011680"/>
+          <p:cNvPr id="10" name="Shape 8"/>
+          <p:cNvSpPr/>
+          <p:nvPr/>
+        </p:nvSpPr>
+        <p:spPr>
+          <a:xfrm>
+            <a:off x="804672" y="2221992"/>
+            <a:ext cx="2029968" cy="16459"/>
+          </a:xfrm>
+          <a:prstGeom prst="rect">
+            <a:avLst/>
+          </a:prstGeom>
+          <a:solidFill>
+            <a:srgbClr val="264862"/>
+          </a:solidFill>
+          <a:ln/>
+        </p:spPr>
+      </p:sp>
+      <p:sp>
+        <p:nvSpPr>
+          <p:cNvPr id="11" name="Text 9"/>
+          <p:cNvSpPr/>
+          <p:nvPr/>
+        </p:nvSpPr>
+        <p:spPr>
+          <a:xfrm>
+            <a:off x="804672" y="2331720"/>
+            <a:ext cx="2066544" cy="1956816"/>
           </a:xfrm>
           <a:prstGeom prst="rect">
             <a:avLst/>
@@ -9056,7 +9916,7 @@
             <a:r>
               <a:rPr lang="en-US" sz="1250" dirty="0">
                 <a:solidFill>
-                  <a:srgbClr val="E8EEF5"/>
+                  <a:srgbClr val="EAF1F8"/>
                 </a:solidFill>
                 <a:latin typeface="Calibri" pitchFamily="34" charset="0"/>
                 <a:ea typeface="Calibri" pitchFamily="34" charset="-122"/>
@@ -9077,7 +9937,7 @@
             <a:r>
               <a:rPr lang="en-US" sz="1250" dirty="0">
                 <a:solidFill>
-                  <a:srgbClr val="E8EEF5"/>
+                  <a:srgbClr val="EAF1F8"/>
                 </a:solidFill>
                 <a:latin typeface="Calibri" pitchFamily="34" charset="0"/>
                 <a:ea typeface="Calibri" pitchFamily="34" charset="-122"/>
@@ -9098,7 +9958,7 @@
             <a:r>
               <a:rPr lang="en-US" sz="1250" dirty="0">
                 <a:solidFill>
-                  <a:srgbClr val="E8EEF5"/>
+                  <a:srgbClr val="EAF1F8"/>
                 </a:solidFill>
                 <a:latin typeface="Calibri" pitchFamily="34" charset="0"/>
                 <a:ea typeface="Calibri" pitchFamily="34" charset="-122"/>
@@ -9112,7 +9972,7 @@
       </p:sp>
       <p:sp>
         <p:nvSpPr>
-          <p:cNvPr id="10" name="Shape 8"/>
+          <p:cNvPr id="12" name="Shape 10"/>
           <p:cNvSpPr/>
           <p:nvPr/>
         </p:nvSpPr>
@@ -9121,11 +9981,13 @@
             <a:off x="3200400" y="1691640"/>
             <a:ext cx="2542032" cy="2743200"/>
           </a:xfrm>
-          <a:prstGeom prst="rect">
-            <a:avLst/>
+          <a:prstGeom prst="roundRect">
+            <a:avLst>
+              <a:gd name="adj" fmla="val 1799"/>
+            </a:avLst>
           </a:prstGeom>
           <a:solidFill>
-            <a:srgbClr val="12293D"/>
+            <a:srgbClr val="13283C"/>
           </a:solidFill>
           <a:ln w="15875">
             <a:solidFill>
@@ -9133,18 +9995,25 @@
             </a:solidFill>
             <a:prstDash val="solid"/>
           </a:ln>
-        </p:spPr>
-      </p:sp>
-      <p:sp>
-        <p:nvSpPr>
-          <p:cNvPr id="11" name="Shape 9"/>
-          <p:cNvSpPr/>
-          <p:nvPr/>
-        </p:nvSpPr>
-        <p:spPr>
-          <a:xfrm>
-            <a:off x="3200400" y="1691640"/>
-            <a:ext cx="82296" cy="2743200"/>
+          <a:effectLst>
+            <a:outerShdw sx="100000" sy="100000" kx="0" ky="0" algn="bl" rotWithShape="0" blurRad="88900" dist="38100" dir="5400000">
+              <a:srgbClr val="000000">
+                <a:alpha val="50000"/>
+              </a:srgbClr>
+            </a:outerShdw>
+          </a:effectLst>
+        </p:spPr>
+      </p:sp>
+      <p:sp>
+        <p:nvSpPr>
+          <p:cNvPr id="13" name="Shape 11"/>
+          <p:cNvSpPr/>
+          <p:nvPr/>
+        </p:nvSpPr>
+        <p:spPr>
+          <a:xfrm>
+            <a:off x="3214116" y="1764792"/>
+            <a:ext cx="73152" cy="2596896"/>
           </a:xfrm>
           <a:prstGeom prst="rect">
             <a:avLst/>
@@ -9157,14 +10026,14 @@
       </p:sp>
       <p:sp>
         <p:nvSpPr>
-          <p:cNvPr id="12" name="Text 10"/>
-          <p:cNvSpPr/>
-          <p:nvPr/>
-        </p:nvSpPr>
-        <p:spPr>
-          <a:xfrm>
-            <a:off x="3438144" y="1837944"/>
-            <a:ext cx="2157984" cy="384048"/>
+          <p:cNvPr id="14" name="Text 12"/>
+          <p:cNvSpPr/>
+          <p:nvPr/>
+        </p:nvSpPr>
+        <p:spPr>
+          <a:xfrm>
+            <a:off x="3456432" y="1828800"/>
+            <a:ext cx="2139696" cy="384048"/>
           </a:xfrm>
           <a:prstGeom prst="rect">
             <a:avLst/>
@@ -9180,7 +10049,7 @@
               <a:buNone/>
             </a:pPr>
             <a:r>
-              <a:rPr lang="en-US" sz="1500" b="1" dirty="0">
+              <a:rPr lang="en-US" sz="1500" b="1" spc="50" kern="0" dirty="0">
                 <a:solidFill>
                   <a:srgbClr val="34D399"/>
                 </a:solidFill>
@@ -9196,14 +10065,34 @@
       </p:sp>
       <p:sp>
         <p:nvSpPr>
-          <p:cNvPr id="13" name="Text 11"/>
-          <p:cNvSpPr/>
-          <p:nvPr/>
-        </p:nvSpPr>
-        <p:spPr>
-          <a:xfrm>
-            <a:off x="3438144" y="2276856"/>
-            <a:ext cx="2084832" cy="2011680"/>
+          <p:cNvPr id="15" name="Shape 13"/>
+          <p:cNvSpPr/>
+          <p:nvPr/>
+        </p:nvSpPr>
+        <p:spPr>
+          <a:xfrm>
+            <a:off x="3456432" y="2221992"/>
+            <a:ext cx="2029968" cy="16459"/>
+          </a:xfrm>
+          <a:prstGeom prst="rect">
+            <a:avLst/>
+          </a:prstGeom>
+          <a:solidFill>
+            <a:srgbClr val="264862"/>
+          </a:solidFill>
+          <a:ln/>
+        </p:spPr>
+      </p:sp>
+      <p:sp>
+        <p:nvSpPr>
+          <p:cNvPr id="16" name="Text 14"/>
+          <p:cNvSpPr/>
+          <p:nvPr/>
+        </p:nvSpPr>
+        <p:spPr>
+          <a:xfrm>
+            <a:off x="3456432" y="2331720"/>
+            <a:ext cx="2066544" cy="1956816"/>
           </a:xfrm>
           <a:prstGeom prst="rect">
             <a:avLst/>
@@ -9225,7 +10114,7 @@
             <a:r>
               <a:rPr lang="en-US" sz="1250" dirty="0">
                 <a:solidFill>
-                  <a:srgbClr val="E8EEF5"/>
+                  <a:srgbClr val="EAF1F8"/>
                 </a:solidFill>
                 <a:latin typeface="Calibri" pitchFamily="34" charset="0"/>
                 <a:ea typeface="Calibri" pitchFamily="34" charset="-122"/>
@@ -9246,7 +10135,7 @@
             <a:r>
               <a:rPr lang="en-US" sz="1250" dirty="0">
                 <a:solidFill>
-                  <a:srgbClr val="E8EEF5"/>
+                  <a:srgbClr val="EAF1F8"/>
                 </a:solidFill>
                 <a:latin typeface="Calibri" pitchFamily="34" charset="0"/>
                 <a:ea typeface="Calibri" pitchFamily="34" charset="-122"/>
@@ -9267,7 +10156,7 @@
             <a:r>
               <a:rPr lang="en-US" sz="1250" dirty="0">
                 <a:solidFill>
-                  <a:srgbClr val="E8EEF5"/>
+                  <a:srgbClr val="EAF1F8"/>
                 </a:solidFill>
                 <a:latin typeface="Calibri" pitchFamily="34" charset="0"/>
                 <a:ea typeface="Calibri" pitchFamily="34" charset="-122"/>
@@ -9281,7 +10170,7 @@
       </p:sp>
       <p:sp>
         <p:nvSpPr>
-          <p:cNvPr id="14" name="Shape 12"/>
+          <p:cNvPr id="17" name="Shape 15"/>
           <p:cNvSpPr/>
           <p:nvPr/>
         </p:nvSpPr>
@@ -9290,11 +10179,13 @@
             <a:off x="5669280" y="1691640"/>
             <a:ext cx="2542032" cy="2743200"/>
           </a:xfrm>
-          <a:prstGeom prst="rect">
-            <a:avLst/>
+          <a:prstGeom prst="roundRect">
+            <a:avLst>
+              <a:gd name="adj" fmla="val 1799"/>
+            </a:avLst>
           </a:prstGeom>
           <a:solidFill>
-            <a:srgbClr val="12293D"/>
+            <a:srgbClr val="13283C"/>
           </a:solidFill>
           <a:ln w="15875">
             <a:solidFill>
@@ -9302,18 +10193,25 @@
             </a:solidFill>
             <a:prstDash val="solid"/>
           </a:ln>
-        </p:spPr>
-      </p:sp>
-      <p:sp>
-        <p:nvSpPr>
-          <p:cNvPr id="15" name="Shape 13"/>
-          <p:cNvSpPr/>
-          <p:nvPr/>
-        </p:nvSpPr>
-        <p:spPr>
-          <a:xfrm>
-            <a:off x="5669280" y="1691640"/>
-            <a:ext cx="82296" cy="2743200"/>
+          <a:effectLst>
+            <a:outerShdw sx="100000" sy="100000" kx="0" ky="0" algn="bl" rotWithShape="0" blurRad="88900" dist="38100" dir="5400000">
+              <a:srgbClr val="000000">
+                <a:alpha val="50000"/>
+              </a:srgbClr>
+            </a:outerShdw>
+          </a:effectLst>
+        </p:spPr>
+      </p:sp>
+      <p:sp>
+        <p:nvSpPr>
+          <p:cNvPr id="18" name="Shape 16"/>
+          <p:cNvSpPr/>
+          <p:nvPr/>
+        </p:nvSpPr>
+        <p:spPr>
+          <a:xfrm>
+            <a:off x="5682996" y="1764792"/>
+            <a:ext cx="73152" cy="2596896"/>
           </a:xfrm>
           <a:prstGeom prst="rect">
             <a:avLst/>
@@ -9326,14 +10224,14 @@
       </p:sp>
       <p:sp>
         <p:nvSpPr>
-          <p:cNvPr id="16" name="Text 14"/>
-          <p:cNvSpPr/>
-          <p:nvPr/>
-        </p:nvSpPr>
-        <p:spPr>
-          <a:xfrm>
-            <a:off x="5907024" y="1837944"/>
-            <a:ext cx="2157984" cy="384048"/>
+          <p:cNvPr id="19" name="Text 17"/>
+          <p:cNvSpPr/>
+          <p:nvPr/>
+        </p:nvSpPr>
+        <p:spPr>
+          <a:xfrm>
+            <a:off x="5925312" y="1828800"/>
+            <a:ext cx="2139696" cy="384048"/>
           </a:xfrm>
           <a:prstGeom prst="rect">
             <a:avLst/>
@@ -9349,7 +10247,7 @@
               <a:buNone/>
             </a:pPr>
             <a:r>
-              <a:rPr lang="en-US" sz="1500" b="1" dirty="0">
+              <a:rPr lang="en-US" sz="1500" b="1" spc="50" kern="0" dirty="0">
                 <a:solidFill>
                   <a:srgbClr val="FBBF24"/>
                 </a:solidFill>
@@ -9365,14 +10263,34 @@
       </p:sp>
       <p:sp>
         <p:nvSpPr>
-          <p:cNvPr id="17" name="Text 15"/>
-          <p:cNvSpPr/>
-          <p:nvPr/>
-        </p:nvSpPr>
-        <p:spPr>
-          <a:xfrm>
-            <a:off x="5907024" y="2276856"/>
-            <a:ext cx="2084832" cy="2011680"/>
+          <p:cNvPr id="20" name="Shape 18"/>
+          <p:cNvSpPr/>
+          <p:nvPr/>
+        </p:nvSpPr>
+        <p:spPr>
+          <a:xfrm>
+            <a:off x="5925312" y="2221992"/>
+            <a:ext cx="2029968" cy="16459"/>
+          </a:xfrm>
+          <a:prstGeom prst="rect">
+            <a:avLst/>
+          </a:prstGeom>
+          <a:solidFill>
+            <a:srgbClr val="264862"/>
+          </a:solidFill>
+          <a:ln/>
+        </p:spPr>
+      </p:sp>
+      <p:sp>
+        <p:nvSpPr>
+          <p:cNvPr id="21" name="Text 19"/>
+          <p:cNvSpPr/>
+          <p:nvPr/>
+        </p:nvSpPr>
+        <p:spPr>
+          <a:xfrm>
+            <a:off x="5925312" y="2331720"/>
+            <a:ext cx="2066544" cy="1956816"/>
           </a:xfrm>
           <a:prstGeom prst="rect">
             <a:avLst/>
@@ -9394,7 +10312,7 @@
             <a:r>
               <a:rPr lang="en-US" sz="1250" dirty="0">
                 <a:solidFill>
-                  <a:srgbClr val="E8EEF5"/>
+                  <a:srgbClr val="EAF1F8"/>
                 </a:solidFill>
                 <a:latin typeface="Calibri" pitchFamily="34" charset="0"/>
                 <a:ea typeface="Calibri" pitchFamily="34" charset="-122"/>
@@ -9415,7 +10333,7 @@
             <a:r>
               <a:rPr lang="en-US" sz="1250" dirty="0">
                 <a:solidFill>
-                  <a:srgbClr val="E8EEF5"/>
+                  <a:srgbClr val="EAF1F8"/>
                 </a:solidFill>
                 <a:latin typeface="Calibri" pitchFamily="34" charset="0"/>
                 <a:ea typeface="Calibri" pitchFamily="34" charset="-122"/>
@@ -9436,7 +10354,7 @@
             <a:r>
               <a:rPr lang="en-US" sz="1250" dirty="0">
                 <a:solidFill>
-                  <a:srgbClr val="E8EEF5"/>
+                  <a:srgbClr val="EAF1F8"/>
                 </a:solidFill>
                 <a:latin typeface="Calibri" pitchFamily="34" charset="0"/>
                 <a:ea typeface="Calibri" pitchFamily="34" charset="-122"/>
